--- a/output/wordlabs-learn-3day.pptx
+++ b/output/wordlabs-learn-3day.pptx
@@ -4279,7 +4279,7 @@
                 <a:ea typeface="Calibri" pitchFamily="34" charset="-122"/>
                 <a:cs typeface="Calibri" pitchFamily="34" charset="-120"/>
               </a:rPr>
-              <a:t>Origin: Old English: leornian</a:t>
+              <a:t>Origin: Latin: lira (furrow, track)</a:t>
             </a:r>
             <a:endParaRPr lang="en-US" sz="1300" dirty="0"/>
           </a:p>
@@ -6040,7 +6040,7 @@
                 <a:ea typeface="Calibri" pitchFamily="34" charset="-122"/>
                 <a:cs typeface="Calibri" pitchFamily="34" charset="-120"/>
               </a:rPr>
-              <a:t>The eager </a:t>
+              <a:t>Every </a:t>
             </a:r>
             <a:pPr algn="l" indent="0" marL="0">
               <a:buNone/>
@@ -6071,7 +6071,7 @@
                 <a:ea typeface="Calibri" pitchFamily="34" charset="-122"/>
                 <a:cs typeface="Calibri" pitchFamily="34" charset="-120"/>
               </a:rPr>
-              <a:t> discovered that </a:t>
+              <a:t> in our class enjoyed </a:t>
             </a:r>
             <a:pPr algn="l" indent="0" marL="0">
               <a:buNone/>
@@ -6102,7 +6102,7 @@
                 <a:ea typeface="Calibri" pitchFamily="34" charset="-122"/>
                 <a:cs typeface="Calibri" pitchFamily="34" charset="-120"/>
               </a:rPr>
-              <a:t> her times tables made maths much easier.</a:t>
+              <a:t> the steps to the dance.</a:t>
             </a:r>
             <a:endParaRPr lang="en-US" sz="1800" dirty="0"/>
           </a:p>
@@ -12355,7 +12355,7 @@
                 <a:ea typeface="Calibri" pitchFamily="34" charset="-122"/>
                 <a:cs typeface="Calibri" pitchFamily="34" charset="-120"/>
               </a:rPr>
-              <a:t>action in progress</a:t>
+              <a:t>ongoing action</a:t>
             </a:r>
             <a:endParaRPr lang="en-US" sz="850" dirty="0"/>
           </a:p>
@@ -13452,7 +13452,7 @@
                 <a:ea typeface="Calibri" pitchFamily="34" charset="-122"/>
                 <a:cs typeface="Calibri" pitchFamily="34" charset="-120"/>
               </a:rPr>
-              <a:t>action in progress</a:t>
+              <a:t>ongoing action</a:t>
             </a:r>
             <a:endParaRPr lang="en-US" sz="850" dirty="0"/>
           </a:p>
@@ -15051,7 +15051,7 @@
                 <a:ea typeface="Calibri" pitchFamily="34" charset="-122"/>
                 <a:cs typeface="Calibri" pitchFamily="34" charset="-120"/>
               </a:rPr>
-              <a:t>action in progress</a:t>
+              <a:t>ongoing action</a:t>
             </a:r>
             <a:endParaRPr lang="en-US" sz="850" dirty="0"/>
           </a:p>
@@ -16817,7 +16817,7 @@
                 <a:ea typeface="Trebuchet MS" pitchFamily="34" charset="-122"/>
                 <a:cs typeface="Trebuchet MS" pitchFamily="34" charset="-120"/>
               </a:rPr>
-              <a:t>1</a:t>
+              <a:t>2</a:t>
             </a:r>
             <a:pPr algn="ctr" indent="0" marL="0">
               <a:buNone/>
@@ -16831,7 +16831,7 @@
                 <a:ea typeface="Trebuchet MS" pitchFamily="34" charset="-122"/>
                 <a:cs typeface="Trebuchet MS" pitchFamily="34" charset="-120"/>
               </a:rPr>
-              <a:t>  punctuation mark</a:t>
+              <a:t>  punctuation marks</a:t>
             </a:r>
             <a:endParaRPr lang="en-US" sz="2800" dirty="0"/>
           </a:p>
@@ -17235,7 +17235,7 @@
                 <a:ea typeface="Calibri" pitchFamily="34" charset="-122"/>
                 <a:cs typeface="Calibri" pitchFamily="34" charset="-120"/>
               </a:rPr>
-              <a:t>Skilled </a:t>
+              <a:t>The </a:t>
             </a:r>
             <a:pPr algn="l" indent="0" marL="0">
               <a:buNone/>
@@ -17266,7 +17266,7 @@
                 <a:ea typeface="Calibri" pitchFamily="34" charset="-122"/>
                 <a:cs typeface="Calibri" pitchFamily="34" charset="-120"/>
               </a:rPr>
-              <a:t> who </a:t>
+              <a:t> were excited; their </a:t>
             </a:r>
             <a:pPr algn="l" indent="0" marL="0">
               <a:buNone/>
@@ -17283,7 +17283,7 @@
                 <a:ea typeface="Calibri" pitchFamily="34" charset="-122"/>
                 <a:cs typeface="Calibri" pitchFamily="34" charset="-120"/>
               </a:rPr>
-              <a:t>relearned</a:t>
+              <a:t>self-learning</a:t>
             </a:r>
             <a:pPr algn="l" indent="0" marL="0">
               <a:buNone/>
@@ -17297,7 +17297,7 @@
                 <a:ea typeface="Calibri" pitchFamily="34" charset="-122"/>
                 <a:cs typeface="Calibri" pitchFamily="34" charset="-120"/>
               </a:rPr>
-              <a:t> the topic carefully became the most </a:t>
+              <a:t> projects showed how much they had </a:t>
             </a:r>
             <a:pPr algn="l" indent="0" marL="0">
               <a:buNone/>
@@ -17328,7 +17328,7 @@
                 <a:ea typeface="Calibri" pitchFamily="34" charset="-122"/>
                 <a:cs typeface="Calibri" pitchFamily="34" charset="-120"/>
               </a:rPr>
-              <a:t> students in the class.</a:t>
+              <a:t>.</a:t>
             </a:r>
             <a:endParaRPr lang="en-US" sz="1800" dirty="0"/>
           </a:p>
@@ -17611,7 +17611,7 @@
                 <a:ea typeface="Trebuchet MS" pitchFamily="34" charset="-122"/>
                 <a:cs typeface="Trebuchet MS" pitchFamily="34" charset="-120"/>
               </a:rPr>
-              <a:t>relearned</a:t>
+              <a:t>self-learning</a:t>
             </a:r>
             <a:endParaRPr lang="en-US" sz="1400" dirty="0"/>
           </a:p>
@@ -19116,7 +19116,7 @@
         </p:nvSpPr>
         <p:spPr>
           <a:xfrm>
-            <a:off x="2221992" y="2258568"/>
+            <a:off x="2938272" y="2258568"/>
             <a:ext cx="1828800" cy="292608"/>
           </a:xfrm>
           <a:prstGeom prst="rect">
@@ -19150,7 +19150,7 @@
         </p:nvSpPr>
         <p:spPr>
           <a:xfrm>
-            <a:off x="2221992" y="2258568"/>
+            <a:off x="2938272" y="2258568"/>
             <a:ext cx="1828800" cy="292608"/>
           </a:xfrm>
           <a:prstGeom prst="rect">
@@ -19189,7 +19189,7 @@
         </p:nvSpPr>
         <p:spPr>
           <a:xfrm>
-            <a:off x="2221992" y="2569464"/>
+            <a:off x="2938272" y="2569464"/>
             <a:ext cx="1828800" cy="201168"/>
           </a:xfrm>
           <a:prstGeom prst="rect">
@@ -19228,7 +19228,7 @@
         </p:nvSpPr>
         <p:spPr>
           <a:xfrm>
-            <a:off x="4370832" y="2258568"/>
+            <a:off x="5803392" y="2258568"/>
             <a:ext cx="1828800" cy="292608"/>
           </a:xfrm>
           <a:prstGeom prst="rect">
@@ -19262,7 +19262,7 @@
         </p:nvSpPr>
         <p:spPr>
           <a:xfrm>
-            <a:off x="4370832" y="2258568"/>
+            <a:off x="5803392" y="2258568"/>
             <a:ext cx="1828800" cy="292608"/>
           </a:xfrm>
           <a:prstGeom prst="rect">
@@ -19287,7 +19287,7 @@
                 <a:ea typeface="Trebuchet MS" pitchFamily="34" charset="-122"/>
                 <a:cs typeface="Trebuchet MS" pitchFamily="34" charset="-120"/>
               </a:rPr>
-              <a:t>er</a:t>
+              <a:t>ers</a:t>
             </a:r>
             <a:endParaRPr lang="en-US" sz="1300" dirty="0"/>
           </a:p>
@@ -19301,7 +19301,7 @@
         </p:nvSpPr>
         <p:spPr>
           <a:xfrm>
-            <a:off x="4370832" y="2569464"/>
+            <a:off x="5803392" y="2569464"/>
             <a:ext cx="1828800" cy="201168"/>
           </a:xfrm>
           <a:prstGeom prst="rect">
@@ -19326,7 +19326,7 @@
                 <a:ea typeface="Calibri" pitchFamily="34" charset="-122"/>
                 <a:cs typeface="Calibri" pitchFamily="34" charset="-120"/>
               </a:rPr>
-              <a:t>a person who does something</a:t>
+              <a:t>a group of people who do something</a:t>
             </a:r>
             <a:endParaRPr lang="en-US" sz="850" dirty="0"/>
           </a:p>
@@ -19340,30 +19340,23 @@
         </p:nvSpPr>
         <p:spPr>
           <a:xfrm>
-            <a:off x="6519672" y="2258568"/>
-            <a:ext cx="1828800" cy="292608"/>
+            <a:off x="365760" y="3273552"/>
+            <a:ext cx="1371600" cy="658368"/>
           </a:xfrm>
           <a:prstGeom prst="rect">
             <a:avLst>
-              <a:gd name="adj" fmla="val 25000"/>
+              <a:gd name="adj" fmla="val 8333"/>
             </a:avLst>
           </a:prstGeom>
           <a:solidFill>
-            <a:srgbClr val="FCE7F3"/>
-          </a:solidFill>
-          <a:ln w="19050">
-            <a:solidFill>
-              <a:srgbClr val="DB2777"/>
-            </a:solidFill>
-            <a:prstDash val="solid"/>
-          </a:ln>
-          <a:effectLst>
-            <a:outerShdw sx="100000" sy="100000" kx="0" ky="0" algn="bl" rotWithShape="0" blurRad="101600" dist="38100" dir="8100000">
-              <a:srgbClr val="000000">
-                <a:alpha val="12000"/>
-              </a:srgbClr>
-            </a:outerShdw>
-          </a:effectLst>
+            <a:srgbClr val="E2E8F0"/>
+          </a:solidFill>
+          <a:ln w="12700">
+            <a:solidFill>
+              <a:srgbClr val="E2E8F0"/>
+            </a:solidFill>
+            <a:prstDash val="solid"/>
+          </a:ln>
         </p:spPr>
       </p:sp>
       <p:sp>
@@ -19374,8 +19367,8 @@
         </p:nvSpPr>
         <p:spPr>
           <a:xfrm>
-            <a:off x="6519672" y="2258568"/>
-            <a:ext cx="1828800" cy="292608"/>
+            <a:off x="365760" y="3273552"/>
+            <a:ext cx="1371600" cy="658368"/>
           </a:xfrm>
           <a:prstGeom prst="rect">
             <a:avLst/>
@@ -19391,73 +19384,100 @@
               <a:buNone/>
             </a:pPr>
             <a:r>
-              <a:rPr lang="en-US" sz="1300" b="1" dirty="0">
-                <a:solidFill>
-                  <a:srgbClr val="9D174D"/>
+              <a:rPr lang="en-US" sz="1100" b="1" dirty="0">
+                <a:solidFill>
+                  <a:srgbClr val="475569"/>
                 </a:solidFill>
                 <a:latin typeface="Trebuchet MS" pitchFamily="34" charset="0"/>
                 <a:ea typeface="Trebuchet MS" pitchFamily="34" charset="-122"/>
                 <a:cs typeface="Trebuchet MS" pitchFamily="34" charset="-120"/>
               </a:rPr>
-              <a:t>s</a:t>
-            </a:r>
-            <a:endParaRPr lang="en-US" sz="1300" dirty="0"/>
-          </a:p>
-        </p:txBody>
-      </p:sp>
-      <p:sp>
-        <p:nvSpPr>
-          <p:cNvPr id="24" name="Text 22"/>
-          <p:cNvSpPr/>
-          <p:nvPr/>
-        </p:nvSpPr>
-        <p:spPr>
-          <a:xfrm>
-            <a:off x="6519672" y="2569464"/>
-            <a:ext cx="1828800" cy="201168"/>
-          </a:xfrm>
-          <a:prstGeom prst="rect">
-            <a:avLst/>
-          </a:prstGeom>
-          <a:noFill/>
-          <a:ln/>
-        </p:spPr>
-        <p:txBody>
-          <a:bodyPr wrap="square" lIns="0" tIns="0" rIns="0" bIns="0" rtlCol="0" anchor="t"/>
-          <a:lstStyle/>
-          <a:p>
-            <a:pPr algn="ctr" indent="0" marL="0">
-              <a:buNone/>
-            </a:pPr>
-            <a:r>
-              <a:rPr lang="en-US" sz="850" dirty="0">
-                <a:solidFill>
-                  <a:srgbClr val="475569"/>
+              <a:t>Syllables</a:t>
+            </a:r>
+            <a:endParaRPr lang="en-US" sz="1100" dirty="0"/>
+          </a:p>
+        </p:txBody>
+      </p:sp>
+      <p:sp>
+        <p:nvSpPr>
+          <p:cNvPr id="24" name="Shape 22"/>
+          <p:cNvSpPr/>
+          <p:nvPr/>
+        </p:nvSpPr>
+        <p:spPr>
+          <a:xfrm>
+            <a:off x="1874520" y="3273552"/>
+            <a:ext cx="6903720" cy="658368"/>
+          </a:xfrm>
+          <a:prstGeom prst="rect">
+            <a:avLst>
+              <a:gd name="adj" fmla="val 8333"/>
+            </a:avLst>
+          </a:prstGeom>
+          <a:solidFill>
+            <a:srgbClr val="F8FAFC"/>
+          </a:solidFill>
+          <a:ln w="12700">
+            <a:solidFill>
+              <a:srgbClr val="E2E8F0"/>
+            </a:solidFill>
+            <a:prstDash val="dash"/>
+          </a:ln>
+        </p:spPr>
+      </p:sp>
+      <p:sp>
+        <p:nvSpPr>
+          <p:cNvPr id="25" name="Text 23"/>
+          <p:cNvSpPr/>
+          <p:nvPr/>
+        </p:nvSpPr>
+        <p:spPr>
+          <a:xfrm>
+            <a:off x="1874520" y="3273552"/>
+            <a:ext cx="6903720" cy="658368"/>
+          </a:xfrm>
+          <a:prstGeom prst="rect">
+            <a:avLst/>
+          </a:prstGeom>
+          <a:noFill/>
+          <a:ln/>
+        </p:spPr>
+        <p:txBody>
+          <a:bodyPr wrap="square" rtlCol="0" anchor="ctr"/>
+          <a:lstStyle/>
+          <a:p>
+            <a:pPr algn="ctr" indent="0" marL="0">
+              <a:buNone/>
+            </a:pPr>
+            <a:r>
+              <a:rPr lang="en-US" sz="1100" i="1" dirty="0">
+                <a:solidFill>
+                  <a:srgbClr val="CBD5E1"/>
                 </a:solidFill>
                 <a:latin typeface="Calibri" pitchFamily="34" charset="0"/>
                 <a:ea typeface="Calibri" pitchFamily="34" charset="-122"/>
                 <a:cs typeface="Calibri" pitchFamily="34" charset="-120"/>
               </a:rPr>
-              <a:t>more than one</a:t>
-            </a:r>
-            <a:endParaRPr lang="en-US" sz="850" dirty="0"/>
-          </a:p>
-        </p:txBody>
-      </p:sp>
-      <p:sp>
-        <p:nvSpPr>
-          <p:cNvPr id="25" name="Shape 23"/>
-          <p:cNvSpPr/>
-          <p:nvPr/>
-        </p:nvSpPr>
-        <p:spPr>
-          <a:xfrm>
-            <a:off x="365760" y="3273552"/>
-            <a:ext cx="1371600" cy="658368"/>
+              <a:t>Write here...</a:t>
+            </a:r>
+            <a:endParaRPr lang="en-US" sz="1100" dirty="0"/>
+          </a:p>
+        </p:txBody>
+      </p:sp>
+      <p:sp>
+        <p:nvSpPr>
+          <p:cNvPr id="26" name="Shape 24"/>
+          <p:cNvSpPr/>
+          <p:nvPr/>
+        </p:nvSpPr>
+        <p:spPr>
+          <a:xfrm>
+            <a:off x="365760" y="4096512"/>
+            <a:ext cx="1371600" cy="804672"/>
           </a:xfrm>
           <a:prstGeom prst="rect">
             <a:avLst>
-              <a:gd name="adj" fmla="val 8333"/>
+              <a:gd name="adj" fmla="val 6818"/>
             </a:avLst>
           </a:prstGeom>
           <a:solidFill>
@@ -19473,14 +19493,14 @@
       </p:sp>
       <p:sp>
         <p:nvSpPr>
-          <p:cNvPr id="26" name="Text 24"/>
-          <p:cNvSpPr/>
-          <p:nvPr/>
-        </p:nvSpPr>
-        <p:spPr>
-          <a:xfrm>
-            <a:off x="365760" y="3273552"/>
-            <a:ext cx="1371600" cy="658368"/>
+          <p:cNvPr id="27" name="Text 25"/>
+          <p:cNvSpPr/>
+          <p:nvPr/>
+        </p:nvSpPr>
+        <p:spPr>
+          <a:xfrm>
+            <a:off x="365760" y="4096512"/>
+            <a:ext cx="1371600" cy="804672"/>
           </a:xfrm>
           <a:prstGeom prst="rect">
             <a:avLst/>
@@ -19504,7 +19524,7 @@
                 <a:ea typeface="Trebuchet MS" pitchFamily="34" charset="-122"/>
                 <a:cs typeface="Trebuchet MS" pitchFamily="34" charset="-120"/>
               </a:rPr>
-              <a:t>Syllables</a:t>
+              <a:t>Phonemes</a:t>
             </a:r>
             <a:endParaRPr lang="en-US" sz="1100" dirty="0"/>
           </a:p>
@@ -19512,80 +19532,14 @@
       </p:sp>
       <p:sp>
         <p:nvSpPr>
-          <p:cNvPr id="27" name="Shape 25"/>
-          <p:cNvSpPr/>
-          <p:nvPr/>
-        </p:nvSpPr>
-        <p:spPr>
-          <a:xfrm>
-            <a:off x="1874520" y="3273552"/>
-            <a:ext cx="6903720" cy="658368"/>
-          </a:xfrm>
-          <a:prstGeom prst="rect">
-            <a:avLst>
-              <a:gd name="adj" fmla="val 8333"/>
-            </a:avLst>
-          </a:prstGeom>
-          <a:solidFill>
-            <a:srgbClr val="F8FAFC"/>
-          </a:solidFill>
-          <a:ln w="12700">
-            <a:solidFill>
-              <a:srgbClr val="E2E8F0"/>
-            </a:solidFill>
-            <a:prstDash val="dash"/>
-          </a:ln>
-        </p:spPr>
-      </p:sp>
-      <p:sp>
-        <p:nvSpPr>
-          <p:cNvPr id="28" name="Text 26"/>
-          <p:cNvSpPr/>
-          <p:nvPr/>
-        </p:nvSpPr>
-        <p:spPr>
-          <a:xfrm>
-            <a:off x="1874520" y="3273552"/>
-            <a:ext cx="6903720" cy="658368"/>
-          </a:xfrm>
-          <a:prstGeom prst="rect">
-            <a:avLst/>
-          </a:prstGeom>
-          <a:noFill/>
-          <a:ln/>
-        </p:spPr>
-        <p:txBody>
-          <a:bodyPr wrap="square" rtlCol="0" anchor="ctr"/>
-          <a:lstStyle/>
-          <a:p>
-            <a:pPr algn="ctr" indent="0" marL="0">
-              <a:buNone/>
-            </a:pPr>
-            <a:r>
-              <a:rPr lang="en-US" sz="1100" i="1" dirty="0">
-                <a:solidFill>
-                  <a:srgbClr val="CBD5E1"/>
-                </a:solidFill>
-                <a:latin typeface="Calibri" pitchFamily="34" charset="0"/>
-                <a:ea typeface="Calibri" pitchFamily="34" charset="-122"/>
-                <a:cs typeface="Calibri" pitchFamily="34" charset="-120"/>
-              </a:rPr>
-              <a:t>Write here...</a:t>
-            </a:r>
-            <a:endParaRPr lang="en-US" sz="1100" dirty="0"/>
-          </a:p>
-        </p:txBody>
-      </p:sp>
-      <p:sp>
-        <p:nvSpPr>
-          <p:cNvPr id="29" name="Shape 27"/>
-          <p:cNvSpPr/>
-          <p:nvPr/>
-        </p:nvSpPr>
-        <p:spPr>
-          <a:xfrm>
-            <a:off x="365760" y="4096512"/>
-            <a:ext cx="1371600" cy="804672"/>
+          <p:cNvPr id="28" name="Shape 26"/>
+          <p:cNvSpPr/>
+          <p:nvPr/>
+        </p:nvSpPr>
+        <p:spPr>
+          <a:xfrm>
+            <a:off x="1874520" y="4096512"/>
+            <a:ext cx="6903720" cy="804672"/>
           </a:xfrm>
           <a:prstGeom prst="rect">
             <a:avLst>
@@ -19593,85 +19547,19 @@
             </a:avLst>
           </a:prstGeom>
           <a:solidFill>
-            <a:srgbClr val="E2E8F0"/>
+            <a:srgbClr val="F8FAFC"/>
           </a:solidFill>
           <a:ln w="12700">
             <a:solidFill>
               <a:srgbClr val="E2E8F0"/>
             </a:solidFill>
-            <a:prstDash val="solid"/>
-          </a:ln>
-        </p:spPr>
-      </p:sp>
-      <p:sp>
-        <p:nvSpPr>
-          <p:cNvPr id="30" name="Text 28"/>
-          <p:cNvSpPr/>
-          <p:nvPr/>
-        </p:nvSpPr>
-        <p:spPr>
-          <a:xfrm>
-            <a:off x="365760" y="4096512"/>
-            <a:ext cx="1371600" cy="804672"/>
-          </a:xfrm>
-          <a:prstGeom prst="rect">
-            <a:avLst/>
-          </a:prstGeom>
-          <a:noFill/>
-          <a:ln/>
-        </p:spPr>
-        <p:txBody>
-          <a:bodyPr wrap="square" lIns="0" tIns="0" rIns="0" bIns="0" rtlCol="0" anchor="ctr"/>
-          <a:lstStyle/>
-          <a:p>
-            <a:pPr algn="ctr" indent="0" marL="0">
-              <a:buNone/>
-            </a:pPr>
-            <a:r>
-              <a:rPr lang="en-US" sz="1100" b="1" dirty="0">
-                <a:solidFill>
-                  <a:srgbClr val="475569"/>
-                </a:solidFill>
-                <a:latin typeface="Trebuchet MS" pitchFamily="34" charset="0"/>
-                <a:ea typeface="Trebuchet MS" pitchFamily="34" charset="-122"/>
-                <a:cs typeface="Trebuchet MS" pitchFamily="34" charset="-120"/>
-              </a:rPr>
-              <a:t>Phonemes</a:t>
-            </a:r>
-            <a:endParaRPr lang="en-US" sz="1100" dirty="0"/>
-          </a:p>
-        </p:txBody>
-      </p:sp>
-      <p:sp>
-        <p:nvSpPr>
-          <p:cNvPr id="31" name="Shape 29"/>
-          <p:cNvSpPr/>
-          <p:nvPr/>
-        </p:nvSpPr>
-        <p:spPr>
-          <a:xfrm>
-            <a:off x="1874520" y="4096512"/>
-            <a:ext cx="6903720" cy="804672"/>
-          </a:xfrm>
-          <a:prstGeom prst="rect">
-            <a:avLst>
-              <a:gd name="adj" fmla="val 6818"/>
-            </a:avLst>
-          </a:prstGeom>
-          <a:solidFill>
-            <a:srgbClr val="F8FAFC"/>
-          </a:solidFill>
-          <a:ln w="12700">
-            <a:solidFill>
-              <a:srgbClr val="E2E8F0"/>
-            </a:solidFill>
             <a:prstDash val="dash"/>
           </a:ln>
         </p:spPr>
       </p:sp>
       <p:sp>
         <p:nvSpPr>
-          <p:cNvPr id="32" name="Text 30"/>
+          <p:cNvPr id="29" name="Text 27"/>
           <p:cNvSpPr/>
           <p:nvPr/>
         </p:nvSpPr>
@@ -20213,7 +20101,7 @@
         </p:nvSpPr>
         <p:spPr>
           <a:xfrm>
-            <a:off x="2221992" y="2258568"/>
+            <a:off x="2938272" y="2258568"/>
             <a:ext cx="1828800" cy="292608"/>
           </a:xfrm>
           <a:prstGeom prst="rect">
@@ -20247,7 +20135,7 @@
         </p:nvSpPr>
         <p:spPr>
           <a:xfrm>
-            <a:off x="2221992" y="2258568"/>
+            <a:off x="2938272" y="2258568"/>
             <a:ext cx="1828800" cy="292608"/>
           </a:xfrm>
           <a:prstGeom prst="rect">
@@ -20286,7 +20174,7 @@
         </p:nvSpPr>
         <p:spPr>
           <a:xfrm>
-            <a:off x="2221992" y="2569464"/>
+            <a:off x="2938272" y="2569464"/>
             <a:ext cx="1828800" cy="201168"/>
           </a:xfrm>
           <a:prstGeom prst="rect">
@@ -20325,7 +20213,7 @@
         </p:nvSpPr>
         <p:spPr>
           <a:xfrm>
-            <a:off x="4370832" y="2258568"/>
+            <a:off x="5803392" y="2258568"/>
             <a:ext cx="1828800" cy="292608"/>
           </a:xfrm>
           <a:prstGeom prst="rect">
@@ -20359,7 +20247,7 @@
         </p:nvSpPr>
         <p:spPr>
           <a:xfrm>
-            <a:off x="4370832" y="2258568"/>
+            <a:off x="5803392" y="2258568"/>
             <a:ext cx="1828800" cy="292608"/>
           </a:xfrm>
           <a:prstGeom prst="rect">
@@ -20384,7 +20272,7 @@
                 <a:ea typeface="Trebuchet MS" pitchFamily="34" charset="-122"/>
                 <a:cs typeface="Trebuchet MS" pitchFamily="34" charset="-120"/>
               </a:rPr>
-              <a:t>er</a:t>
+              <a:t>ers</a:t>
             </a:r>
             <a:endParaRPr lang="en-US" sz="1300" dirty="0"/>
           </a:p>
@@ -20398,7 +20286,7 @@
         </p:nvSpPr>
         <p:spPr>
           <a:xfrm>
-            <a:off x="4370832" y="2569464"/>
+            <a:off x="5803392" y="2569464"/>
             <a:ext cx="1828800" cy="201168"/>
           </a:xfrm>
           <a:prstGeom prst="rect">
@@ -20423,7 +20311,7 @@
                 <a:ea typeface="Calibri" pitchFamily="34" charset="-122"/>
                 <a:cs typeface="Calibri" pitchFamily="34" charset="-120"/>
               </a:rPr>
-              <a:t>a person who does something</a:t>
+              <a:t>a group of people who do something</a:t>
             </a:r>
             <a:endParaRPr lang="en-US" sz="850" dirty="0"/>
           </a:p>
@@ -20437,30 +20325,23 @@
         </p:nvSpPr>
         <p:spPr>
           <a:xfrm>
-            <a:off x="6519672" y="2258568"/>
-            <a:ext cx="1828800" cy="292608"/>
+            <a:off x="365760" y="3273552"/>
+            <a:ext cx="1371600" cy="658368"/>
           </a:xfrm>
           <a:prstGeom prst="rect">
             <a:avLst>
-              <a:gd name="adj" fmla="val 25000"/>
+              <a:gd name="adj" fmla="val 8333"/>
             </a:avLst>
           </a:prstGeom>
           <a:solidFill>
-            <a:srgbClr val="FCE7F3"/>
-          </a:solidFill>
-          <a:ln w="19050">
-            <a:solidFill>
-              <a:srgbClr val="DB2777"/>
-            </a:solidFill>
-            <a:prstDash val="solid"/>
-          </a:ln>
-          <a:effectLst>
-            <a:outerShdw sx="100000" sy="100000" kx="0" ky="0" algn="bl" rotWithShape="0" blurRad="101600" dist="38100" dir="8100000">
-              <a:srgbClr val="000000">
-                <a:alpha val="12000"/>
-              </a:srgbClr>
-            </a:outerShdw>
-          </a:effectLst>
+            <a:srgbClr val="E2E8F0"/>
+          </a:solidFill>
+          <a:ln w="12700">
+            <a:solidFill>
+              <a:srgbClr val="E2E8F0"/>
+            </a:solidFill>
+            <a:prstDash val="solid"/>
+          </a:ln>
         </p:spPr>
       </p:sp>
       <p:sp>
@@ -20471,8 +20352,8 @@
         </p:nvSpPr>
         <p:spPr>
           <a:xfrm>
-            <a:off x="6519672" y="2258568"/>
-            <a:ext cx="1828800" cy="292608"/>
+            <a:off x="365760" y="3273552"/>
+            <a:ext cx="1371600" cy="658368"/>
           </a:xfrm>
           <a:prstGeom prst="rect">
             <a:avLst/>
@@ -20488,69 +20369,30 @@
               <a:buNone/>
             </a:pPr>
             <a:r>
-              <a:rPr lang="en-US" sz="1300" b="1" dirty="0">
-                <a:solidFill>
-                  <a:srgbClr val="9D174D"/>
+              <a:rPr lang="en-US" sz="1100" b="1" dirty="0">
+                <a:solidFill>
+                  <a:srgbClr val="475569"/>
                 </a:solidFill>
                 <a:latin typeface="Trebuchet MS" pitchFamily="34" charset="0"/>
                 <a:ea typeface="Trebuchet MS" pitchFamily="34" charset="-122"/>
                 <a:cs typeface="Trebuchet MS" pitchFamily="34" charset="-120"/>
               </a:rPr>
-              <a:t>s</a:t>
-            </a:r>
-            <a:endParaRPr lang="en-US" sz="1300" dirty="0"/>
-          </a:p>
-        </p:txBody>
-      </p:sp>
-      <p:sp>
-        <p:nvSpPr>
-          <p:cNvPr id="24" name="Text 22"/>
-          <p:cNvSpPr/>
-          <p:nvPr/>
-        </p:nvSpPr>
-        <p:spPr>
-          <a:xfrm>
-            <a:off x="6519672" y="2569464"/>
-            <a:ext cx="1828800" cy="201168"/>
-          </a:xfrm>
-          <a:prstGeom prst="rect">
-            <a:avLst/>
-          </a:prstGeom>
-          <a:noFill/>
-          <a:ln/>
-        </p:spPr>
-        <p:txBody>
-          <a:bodyPr wrap="square" lIns="0" tIns="0" rIns="0" bIns="0" rtlCol="0" anchor="t"/>
-          <a:lstStyle/>
-          <a:p>
-            <a:pPr algn="ctr" indent="0" marL="0">
-              <a:buNone/>
-            </a:pPr>
-            <a:r>
-              <a:rPr lang="en-US" sz="850" dirty="0">
-                <a:solidFill>
-                  <a:srgbClr val="475569"/>
-                </a:solidFill>
-                <a:latin typeface="Calibri" pitchFamily="34" charset="0"/>
-                <a:ea typeface="Calibri" pitchFamily="34" charset="-122"/>
-                <a:cs typeface="Calibri" pitchFamily="34" charset="-120"/>
-              </a:rPr>
-              <a:t>more than one</a:t>
-            </a:r>
-            <a:endParaRPr lang="en-US" sz="850" dirty="0"/>
-          </a:p>
-        </p:txBody>
-      </p:sp>
-      <p:sp>
-        <p:nvSpPr>
-          <p:cNvPr id="25" name="Shape 23"/>
-          <p:cNvSpPr/>
-          <p:nvPr/>
-        </p:nvSpPr>
-        <p:spPr>
-          <a:xfrm>
-            <a:off x="365760" y="3273552"/>
-            <a:ext cx="1371600" cy="658368"/>
+              <a:t>Syllables</a:t>
+            </a:r>
+            <a:endParaRPr lang="en-US" sz="1100" dirty="0"/>
+          </a:p>
+        </p:txBody>
+      </p:sp>
+      <p:sp>
+        <p:nvSpPr>
+          <p:cNvPr id="24" name="Shape 22"/>
+          <p:cNvSpPr/>
+          <p:nvPr/>
+        </p:nvSpPr>
+        <p:spPr>
+          <a:xfrm>
+            <a:off x="1874520" y="3273552"/>
+            <a:ext cx="6903720" cy="658368"/>
           </a:xfrm>
           <a:prstGeom prst="rect">
             <a:avLst>
@@ -20558,11 +20400,38 @@
             </a:avLst>
           </a:prstGeom>
           <a:solidFill>
-            <a:srgbClr val="E2E8F0"/>
-          </a:solidFill>
-          <a:ln w="12700">
-            <a:solidFill>
-              <a:srgbClr val="E2E8F0"/>
+            <a:srgbClr val="CCFBF1"/>
+          </a:solidFill>
+          <a:ln w="12700">
+            <a:solidFill>
+              <a:srgbClr val="0D9488"/>
+            </a:solidFill>
+            <a:prstDash val="solid"/>
+          </a:ln>
+        </p:spPr>
+      </p:sp>
+      <p:sp>
+        <p:nvSpPr>
+          <p:cNvPr id="25" name="Shape 23"/>
+          <p:cNvSpPr/>
+          <p:nvPr/>
+        </p:nvSpPr>
+        <p:spPr>
+          <a:xfrm>
+            <a:off x="2999232" y="3364992"/>
+            <a:ext cx="1645920" cy="475488"/>
+          </a:xfrm>
+          <a:prstGeom prst="rect">
+            <a:avLst>
+              <a:gd name="adj" fmla="val 9615"/>
+            </a:avLst>
+          </a:prstGeom>
+          <a:solidFill>
+            <a:srgbClr val="FFFFFF"/>
+          </a:solidFill>
+          <a:ln w="12700">
+            <a:solidFill>
+              <a:srgbClr val="0D9488"/>
             </a:solidFill>
             <a:prstDash val="solid"/>
           </a:ln>
@@ -20576,8 +20445,8 @@
         </p:nvSpPr>
         <p:spPr>
           <a:xfrm>
-            <a:off x="365760" y="3273552"/>
-            <a:ext cx="1371600" cy="658368"/>
+            <a:off x="2999232" y="3364992"/>
+            <a:ext cx="1645920" cy="475488"/>
           </a:xfrm>
           <a:prstGeom prst="rect">
             <a:avLst/>
@@ -20593,46 +20462,58 @@
               <a:buNone/>
             </a:pPr>
             <a:r>
-              <a:rPr lang="en-US" sz="1100" b="1" dirty="0">
-                <a:solidFill>
-                  <a:srgbClr val="475569"/>
+              <a:rPr lang="en-US" sz="1400" b="1" dirty="0">
+                <a:solidFill>
+                  <a:srgbClr val="0D9488"/>
                 </a:solidFill>
                 <a:latin typeface="Trebuchet MS" pitchFamily="34" charset="0"/>
                 <a:ea typeface="Trebuchet MS" pitchFamily="34" charset="-122"/>
                 <a:cs typeface="Trebuchet MS" pitchFamily="34" charset="-120"/>
               </a:rPr>
-              <a:t>Syllables</a:t>
-            </a:r>
-            <a:endParaRPr lang="en-US" sz="1100" dirty="0"/>
-          </a:p>
-        </p:txBody>
-      </p:sp>
-      <p:sp>
-        <p:nvSpPr>
-          <p:cNvPr id="27" name="Shape 25"/>
-          <p:cNvSpPr/>
-          <p:nvPr/>
-        </p:nvSpPr>
-        <p:spPr>
-          <a:xfrm>
-            <a:off x="1874520" y="3273552"/>
-            <a:ext cx="6903720" cy="658368"/>
-          </a:xfrm>
-          <a:prstGeom prst="rect">
-            <a:avLst>
-              <a:gd name="adj" fmla="val 8333"/>
-            </a:avLst>
-          </a:prstGeom>
-          <a:solidFill>
-            <a:srgbClr val="CCFBF1"/>
-          </a:solidFill>
-          <a:ln w="12700">
-            <a:solidFill>
-              <a:srgbClr val="0D9488"/>
-            </a:solidFill>
-            <a:prstDash val="solid"/>
-          </a:ln>
-        </p:spPr>
+              <a:t>learn</a:t>
+            </a:r>
+            <a:endParaRPr lang="en-US" sz="1400" dirty="0"/>
+          </a:p>
+        </p:txBody>
+      </p:sp>
+      <p:sp>
+        <p:nvSpPr>
+          <p:cNvPr id="27" name="Text 25"/>
+          <p:cNvSpPr/>
+          <p:nvPr/>
+        </p:nvSpPr>
+        <p:spPr>
+          <a:xfrm>
+            <a:off x="4645152" y="3364992"/>
+            <a:ext cx="1097280" cy="475488"/>
+          </a:xfrm>
+          <a:prstGeom prst="rect">
+            <a:avLst/>
+          </a:prstGeom>
+          <a:noFill/>
+          <a:ln/>
+        </p:spPr>
+        <p:txBody>
+          <a:bodyPr wrap="square" lIns="0" tIns="0" rIns="0" bIns="0" rtlCol="0" anchor="ctr"/>
+          <a:lstStyle/>
+          <a:p>
+            <a:pPr algn="ctr" indent="0" marL="0">
+              <a:buNone/>
+            </a:pPr>
+            <a:r>
+              <a:rPr lang="en-US" sz="1600" b="1" dirty="0">
+                <a:solidFill>
+                  <a:srgbClr val="0D9488"/>
+                </a:solidFill>
+                <a:latin typeface="Trebuchet MS" pitchFamily="34" charset="0"/>
+                <a:ea typeface="Trebuchet MS" pitchFamily="34" charset="-122"/>
+                <a:cs typeface="Trebuchet MS" pitchFamily="34" charset="-120"/>
+              </a:rPr>
+              <a:t>·</a:t>
+            </a:r>
+            <a:endParaRPr lang="en-US" sz="1600" dirty="0"/>
+          </a:p>
+        </p:txBody>
       </p:sp>
       <p:sp>
         <p:nvSpPr>
@@ -20642,7 +20523,7 @@
         </p:nvSpPr>
         <p:spPr>
           <a:xfrm>
-            <a:off x="2999232" y="3364992"/>
+            <a:off x="5742432" y="3364992"/>
             <a:ext cx="1645920" cy="475488"/>
           </a:xfrm>
           <a:prstGeom prst="rect">
@@ -20669,7 +20550,7 @@
         </p:nvSpPr>
         <p:spPr>
           <a:xfrm>
-            <a:off x="2999232" y="3364992"/>
+            <a:off x="5742432" y="3364992"/>
             <a:ext cx="1645920" cy="475488"/>
           </a:xfrm>
           <a:prstGeom prst="rect">
@@ -20694,7 +20575,7 @@
                 <a:ea typeface="Trebuchet MS" pitchFamily="34" charset="-122"/>
                 <a:cs typeface="Trebuchet MS" pitchFamily="34" charset="-120"/>
               </a:rPr>
-              <a:t>learn</a:t>
+              <a:t>ers</a:t>
             </a:r>
             <a:endParaRPr lang="en-US" sz="1400" dirty="0"/>
           </a:p>
@@ -20702,14 +20583,41 @@
       </p:sp>
       <p:sp>
         <p:nvSpPr>
-          <p:cNvPr id="30" name="Text 28"/>
-          <p:cNvSpPr/>
-          <p:nvPr/>
-        </p:nvSpPr>
-        <p:spPr>
-          <a:xfrm>
-            <a:off x="4645152" y="3364992"/>
-            <a:ext cx="1097280" cy="475488"/>
+          <p:cNvPr id="30" name="Shape 28"/>
+          <p:cNvSpPr/>
+          <p:nvPr/>
+        </p:nvSpPr>
+        <p:spPr>
+          <a:xfrm>
+            <a:off x="365760" y="4096512"/>
+            <a:ext cx="1371600" cy="804672"/>
+          </a:xfrm>
+          <a:prstGeom prst="rect">
+            <a:avLst>
+              <a:gd name="adj" fmla="val 6818"/>
+            </a:avLst>
+          </a:prstGeom>
+          <a:solidFill>
+            <a:srgbClr val="E2E8F0"/>
+          </a:solidFill>
+          <a:ln w="12700">
+            <a:solidFill>
+              <a:srgbClr val="E2E8F0"/>
+            </a:solidFill>
+            <a:prstDash val="solid"/>
+          </a:ln>
+        </p:spPr>
+      </p:sp>
+      <p:sp>
+        <p:nvSpPr>
+          <p:cNvPr id="31" name="Text 29"/>
+          <p:cNvSpPr/>
+          <p:nvPr/>
+        </p:nvSpPr>
+        <p:spPr>
+          <a:xfrm>
+            <a:off x="365760" y="4096512"/>
+            <a:ext cx="1371600" cy="804672"/>
           </a:xfrm>
           <a:prstGeom prst="rect">
             <a:avLst/>
@@ -20725,96 +20633,30 @@
               <a:buNone/>
             </a:pPr>
             <a:r>
-              <a:rPr lang="en-US" sz="1600" b="1" dirty="0">
-                <a:solidFill>
-                  <a:srgbClr val="0D9488"/>
+              <a:rPr lang="en-US" sz="1100" b="1" dirty="0">
+                <a:solidFill>
+                  <a:srgbClr val="475569"/>
                 </a:solidFill>
                 <a:latin typeface="Trebuchet MS" pitchFamily="34" charset="0"/>
                 <a:ea typeface="Trebuchet MS" pitchFamily="34" charset="-122"/>
                 <a:cs typeface="Trebuchet MS" pitchFamily="34" charset="-120"/>
               </a:rPr>
-              <a:t>·</a:t>
-            </a:r>
-            <a:endParaRPr lang="en-US" sz="1600" dirty="0"/>
-          </a:p>
-        </p:txBody>
-      </p:sp>
-      <p:sp>
-        <p:nvSpPr>
-          <p:cNvPr id="31" name="Shape 29"/>
-          <p:cNvSpPr/>
-          <p:nvPr/>
-        </p:nvSpPr>
-        <p:spPr>
-          <a:xfrm>
-            <a:off x="5742432" y="3364992"/>
-            <a:ext cx="1645920" cy="475488"/>
-          </a:xfrm>
-          <a:prstGeom prst="rect">
-            <a:avLst>
-              <a:gd name="adj" fmla="val 9615"/>
-            </a:avLst>
-          </a:prstGeom>
-          <a:solidFill>
-            <a:srgbClr val="FFFFFF"/>
-          </a:solidFill>
-          <a:ln w="12700">
-            <a:solidFill>
-              <a:srgbClr val="0D9488"/>
-            </a:solidFill>
-            <a:prstDash val="solid"/>
-          </a:ln>
-        </p:spPr>
-      </p:sp>
-      <p:sp>
-        <p:nvSpPr>
-          <p:cNvPr id="32" name="Text 30"/>
-          <p:cNvSpPr/>
-          <p:nvPr/>
-        </p:nvSpPr>
-        <p:spPr>
-          <a:xfrm>
-            <a:off x="5742432" y="3364992"/>
-            <a:ext cx="1645920" cy="475488"/>
-          </a:xfrm>
-          <a:prstGeom prst="rect">
-            <a:avLst/>
-          </a:prstGeom>
-          <a:noFill/>
-          <a:ln/>
-        </p:spPr>
-        <p:txBody>
-          <a:bodyPr wrap="square" lIns="0" tIns="0" rIns="0" bIns="0" rtlCol="0" anchor="ctr"/>
-          <a:lstStyle/>
-          <a:p>
-            <a:pPr algn="ctr" indent="0" marL="0">
-              <a:buNone/>
-            </a:pPr>
-            <a:r>
-              <a:rPr lang="en-US" sz="1400" b="1" dirty="0">
-                <a:solidFill>
-                  <a:srgbClr val="0D9488"/>
-                </a:solidFill>
-                <a:latin typeface="Trebuchet MS" pitchFamily="34" charset="0"/>
-                <a:ea typeface="Trebuchet MS" pitchFamily="34" charset="-122"/>
-                <a:cs typeface="Trebuchet MS" pitchFamily="34" charset="-120"/>
-              </a:rPr>
-              <a:t>ers</a:t>
-            </a:r>
-            <a:endParaRPr lang="en-US" sz="1400" dirty="0"/>
-          </a:p>
-        </p:txBody>
-      </p:sp>
-      <p:sp>
-        <p:nvSpPr>
-          <p:cNvPr id="33" name="Shape 31"/>
-          <p:cNvSpPr/>
-          <p:nvPr/>
-        </p:nvSpPr>
-        <p:spPr>
-          <a:xfrm>
-            <a:off x="365760" y="4096512"/>
-            <a:ext cx="1371600" cy="804672"/>
+              <a:t>Phonemes</a:t>
+            </a:r>
+            <a:endParaRPr lang="en-US" sz="1100" dirty="0"/>
+          </a:p>
+        </p:txBody>
+      </p:sp>
+      <p:sp>
+        <p:nvSpPr>
+          <p:cNvPr id="32" name="Shape 30"/>
+          <p:cNvSpPr/>
+          <p:nvPr/>
+        </p:nvSpPr>
+        <p:spPr>
+          <a:xfrm>
+            <a:off x="1874520" y="4096512"/>
+            <a:ext cx="6903720" cy="804672"/>
           </a:xfrm>
           <a:prstGeom prst="rect">
             <a:avLst>
@@ -20822,85 +20664,19 @@
             </a:avLst>
           </a:prstGeom>
           <a:solidFill>
-            <a:srgbClr val="E2E8F0"/>
+            <a:srgbClr val="F8FAFC"/>
           </a:solidFill>
           <a:ln w="12700">
             <a:solidFill>
               <a:srgbClr val="E2E8F0"/>
             </a:solidFill>
-            <a:prstDash val="solid"/>
-          </a:ln>
-        </p:spPr>
-      </p:sp>
-      <p:sp>
-        <p:nvSpPr>
-          <p:cNvPr id="34" name="Text 32"/>
-          <p:cNvSpPr/>
-          <p:nvPr/>
-        </p:nvSpPr>
-        <p:spPr>
-          <a:xfrm>
-            <a:off x="365760" y="4096512"/>
-            <a:ext cx="1371600" cy="804672"/>
-          </a:xfrm>
-          <a:prstGeom prst="rect">
-            <a:avLst/>
-          </a:prstGeom>
-          <a:noFill/>
-          <a:ln/>
-        </p:spPr>
-        <p:txBody>
-          <a:bodyPr wrap="square" lIns="0" tIns="0" rIns="0" bIns="0" rtlCol="0" anchor="ctr"/>
-          <a:lstStyle/>
-          <a:p>
-            <a:pPr algn="ctr" indent="0" marL="0">
-              <a:buNone/>
-            </a:pPr>
-            <a:r>
-              <a:rPr lang="en-US" sz="1100" b="1" dirty="0">
-                <a:solidFill>
-                  <a:srgbClr val="475569"/>
-                </a:solidFill>
-                <a:latin typeface="Trebuchet MS" pitchFamily="34" charset="0"/>
-                <a:ea typeface="Trebuchet MS" pitchFamily="34" charset="-122"/>
-                <a:cs typeface="Trebuchet MS" pitchFamily="34" charset="-120"/>
-              </a:rPr>
-              <a:t>Phonemes</a:t>
-            </a:r>
-            <a:endParaRPr lang="en-US" sz="1100" dirty="0"/>
-          </a:p>
-        </p:txBody>
-      </p:sp>
-      <p:sp>
-        <p:nvSpPr>
-          <p:cNvPr id="35" name="Shape 33"/>
-          <p:cNvSpPr/>
-          <p:nvPr/>
-        </p:nvSpPr>
-        <p:spPr>
-          <a:xfrm>
-            <a:off x="1874520" y="4096512"/>
-            <a:ext cx="6903720" cy="804672"/>
-          </a:xfrm>
-          <a:prstGeom prst="rect">
-            <a:avLst>
-              <a:gd name="adj" fmla="val 6818"/>
-            </a:avLst>
-          </a:prstGeom>
-          <a:solidFill>
-            <a:srgbClr val="F8FAFC"/>
-          </a:solidFill>
-          <a:ln w="12700">
-            <a:solidFill>
-              <a:srgbClr val="E2E8F0"/>
-            </a:solidFill>
             <a:prstDash val="dash"/>
           </a:ln>
         </p:spPr>
       </p:sp>
       <p:sp>
         <p:nvSpPr>
-          <p:cNvPr id="36" name="Text 34"/>
+          <p:cNvPr id="33" name="Text 31"/>
           <p:cNvSpPr/>
           <p:nvPr/>
         </p:nvSpPr>
@@ -21442,7 +21218,7 @@
         </p:nvSpPr>
         <p:spPr>
           <a:xfrm>
-            <a:off x="2221992" y="2258568"/>
+            <a:off x="2938272" y="2258568"/>
             <a:ext cx="1828800" cy="292608"/>
           </a:xfrm>
           <a:prstGeom prst="rect">
@@ -21476,7 +21252,7 @@
         </p:nvSpPr>
         <p:spPr>
           <a:xfrm>
-            <a:off x="2221992" y="2258568"/>
+            <a:off x="2938272" y="2258568"/>
             <a:ext cx="1828800" cy="292608"/>
           </a:xfrm>
           <a:prstGeom prst="rect">
@@ -21515,7 +21291,7 @@
         </p:nvSpPr>
         <p:spPr>
           <a:xfrm>
-            <a:off x="2221992" y="2569464"/>
+            <a:off x="2938272" y="2569464"/>
             <a:ext cx="1828800" cy="201168"/>
           </a:xfrm>
           <a:prstGeom prst="rect">
@@ -21554,7 +21330,7 @@
         </p:nvSpPr>
         <p:spPr>
           <a:xfrm>
-            <a:off x="4370832" y="2258568"/>
+            <a:off x="5803392" y="2258568"/>
             <a:ext cx="1828800" cy="292608"/>
           </a:xfrm>
           <a:prstGeom prst="rect">
@@ -21588,7 +21364,7 @@
         </p:nvSpPr>
         <p:spPr>
           <a:xfrm>
-            <a:off x="4370832" y="2258568"/>
+            <a:off x="5803392" y="2258568"/>
             <a:ext cx="1828800" cy="292608"/>
           </a:xfrm>
           <a:prstGeom prst="rect">
@@ -21613,7 +21389,7 @@
                 <a:ea typeface="Trebuchet MS" pitchFamily="34" charset="-122"/>
                 <a:cs typeface="Trebuchet MS" pitchFamily="34" charset="-120"/>
               </a:rPr>
-              <a:t>er</a:t>
+              <a:t>ers</a:t>
             </a:r>
             <a:endParaRPr lang="en-US" sz="1300" dirty="0"/>
           </a:p>
@@ -21627,7 +21403,7 @@
         </p:nvSpPr>
         <p:spPr>
           <a:xfrm>
-            <a:off x="4370832" y="2569464"/>
+            <a:off x="5803392" y="2569464"/>
             <a:ext cx="1828800" cy="201168"/>
           </a:xfrm>
           <a:prstGeom prst="rect">
@@ -21652,7 +21428,7 @@
                 <a:ea typeface="Calibri" pitchFamily="34" charset="-122"/>
                 <a:cs typeface="Calibri" pitchFamily="34" charset="-120"/>
               </a:rPr>
-              <a:t>a person who does something</a:t>
+              <a:t>a group of people who do something</a:t>
             </a:r>
             <a:endParaRPr lang="en-US" sz="850" dirty="0"/>
           </a:p>
@@ -21666,30 +21442,23 @@
         </p:nvSpPr>
         <p:spPr>
           <a:xfrm>
-            <a:off x="6519672" y="2258568"/>
-            <a:ext cx="1828800" cy="292608"/>
+            <a:off x="365760" y="3273552"/>
+            <a:ext cx="1371600" cy="658368"/>
           </a:xfrm>
           <a:prstGeom prst="rect">
             <a:avLst>
-              <a:gd name="adj" fmla="val 25000"/>
+              <a:gd name="adj" fmla="val 8333"/>
             </a:avLst>
           </a:prstGeom>
           <a:solidFill>
-            <a:srgbClr val="FCE7F3"/>
-          </a:solidFill>
-          <a:ln w="19050">
-            <a:solidFill>
-              <a:srgbClr val="DB2777"/>
-            </a:solidFill>
-            <a:prstDash val="solid"/>
-          </a:ln>
-          <a:effectLst>
-            <a:outerShdw sx="100000" sy="100000" kx="0" ky="0" algn="bl" rotWithShape="0" blurRad="101600" dist="38100" dir="8100000">
-              <a:srgbClr val="000000">
-                <a:alpha val="12000"/>
-              </a:srgbClr>
-            </a:outerShdw>
-          </a:effectLst>
+            <a:srgbClr val="E2E8F0"/>
+          </a:solidFill>
+          <a:ln w="12700">
+            <a:solidFill>
+              <a:srgbClr val="E2E8F0"/>
+            </a:solidFill>
+            <a:prstDash val="solid"/>
+          </a:ln>
         </p:spPr>
       </p:sp>
       <p:sp>
@@ -21700,8 +21469,8 @@
         </p:nvSpPr>
         <p:spPr>
           <a:xfrm>
-            <a:off x="6519672" y="2258568"/>
-            <a:ext cx="1828800" cy="292608"/>
+            <a:off x="365760" y="3273552"/>
+            <a:ext cx="1371600" cy="658368"/>
           </a:xfrm>
           <a:prstGeom prst="rect">
             <a:avLst/>
@@ -21717,69 +21486,30 @@
               <a:buNone/>
             </a:pPr>
             <a:r>
-              <a:rPr lang="en-US" sz="1300" b="1" dirty="0">
-                <a:solidFill>
-                  <a:srgbClr val="9D174D"/>
+              <a:rPr lang="en-US" sz="1100" b="1" dirty="0">
+                <a:solidFill>
+                  <a:srgbClr val="475569"/>
                 </a:solidFill>
                 <a:latin typeface="Trebuchet MS" pitchFamily="34" charset="0"/>
                 <a:ea typeface="Trebuchet MS" pitchFamily="34" charset="-122"/>
                 <a:cs typeface="Trebuchet MS" pitchFamily="34" charset="-120"/>
               </a:rPr>
-              <a:t>s</a:t>
-            </a:r>
-            <a:endParaRPr lang="en-US" sz="1300" dirty="0"/>
-          </a:p>
-        </p:txBody>
-      </p:sp>
-      <p:sp>
-        <p:nvSpPr>
-          <p:cNvPr id="24" name="Text 22"/>
-          <p:cNvSpPr/>
-          <p:nvPr/>
-        </p:nvSpPr>
-        <p:spPr>
-          <a:xfrm>
-            <a:off x="6519672" y="2569464"/>
-            <a:ext cx="1828800" cy="201168"/>
-          </a:xfrm>
-          <a:prstGeom prst="rect">
-            <a:avLst/>
-          </a:prstGeom>
-          <a:noFill/>
-          <a:ln/>
-        </p:spPr>
-        <p:txBody>
-          <a:bodyPr wrap="square" lIns="0" tIns="0" rIns="0" bIns="0" rtlCol="0" anchor="t"/>
-          <a:lstStyle/>
-          <a:p>
-            <a:pPr algn="ctr" indent="0" marL="0">
-              <a:buNone/>
-            </a:pPr>
-            <a:r>
-              <a:rPr lang="en-US" sz="850" dirty="0">
-                <a:solidFill>
-                  <a:srgbClr val="475569"/>
-                </a:solidFill>
-                <a:latin typeface="Calibri" pitchFamily="34" charset="0"/>
-                <a:ea typeface="Calibri" pitchFamily="34" charset="-122"/>
-                <a:cs typeface="Calibri" pitchFamily="34" charset="-120"/>
-              </a:rPr>
-              <a:t>more than one</a:t>
-            </a:r>
-            <a:endParaRPr lang="en-US" sz="850" dirty="0"/>
-          </a:p>
-        </p:txBody>
-      </p:sp>
-      <p:sp>
-        <p:nvSpPr>
-          <p:cNvPr id="25" name="Shape 23"/>
-          <p:cNvSpPr/>
-          <p:nvPr/>
-        </p:nvSpPr>
-        <p:spPr>
-          <a:xfrm>
-            <a:off x="365760" y="3273552"/>
-            <a:ext cx="1371600" cy="658368"/>
+              <a:t>Syllables</a:t>
+            </a:r>
+            <a:endParaRPr lang="en-US" sz="1100" dirty="0"/>
+          </a:p>
+        </p:txBody>
+      </p:sp>
+      <p:sp>
+        <p:nvSpPr>
+          <p:cNvPr id="24" name="Shape 22"/>
+          <p:cNvSpPr/>
+          <p:nvPr/>
+        </p:nvSpPr>
+        <p:spPr>
+          <a:xfrm>
+            <a:off x="1874520" y="3273552"/>
+            <a:ext cx="6903720" cy="658368"/>
           </a:xfrm>
           <a:prstGeom prst="rect">
             <a:avLst>
@@ -21787,11 +21517,38 @@
             </a:avLst>
           </a:prstGeom>
           <a:solidFill>
-            <a:srgbClr val="E2E8F0"/>
-          </a:solidFill>
-          <a:ln w="12700">
-            <a:solidFill>
-              <a:srgbClr val="E2E8F0"/>
+            <a:srgbClr val="CCFBF1"/>
+          </a:solidFill>
+          <a:ln w="12700">
+            <a:solidFill>
+              <a:srgbClr val="0D9488"/>
+            </a:solidFill>
+            <a:prstDash val="solid"/>
+          </a:ln>
+        </p:spPr>
+      </p:sp>
+      <p:sp>
+        <p:nvSpPr>
+          <p:cNvPr id="25" name="Shape 23"/>
+          <p:cNvSpPr/>
+          <p:nvPr/>
+        </p:nvSpPr>
+        <p:spPr>
+          <a:xfrm>
+            <a:off x="2999232" y="3364992"/>
+            <a:ext cx="1645920" cy="475488"/>
+          </a:xfrm>
+          <a:prstGeom prst="rect">
+            <a:avLst>
+              <a:gd name="adj" fmla="val 9615"/>
+            </a:avLst>
+          </a:prstGeom>
+          <a:solidFill>
+            <a:srgbClr val="FFFFFF"/>
+          </a:solidFill>
+          <a:ln w="12700">
+            <a:solidFill>
+              <a:srgbClr val="0D9488"/>
             </a:solidFill>
             <a:prstDash val="solid"/>
           </a:ln>
@@ -21805,8 +21562,8 @@
         </p:nvSpPr>
         <p:spPr>
           <a:xfrm>
-            <a:off x="365760" y="3273552"/>
-            <a:ext cx="1371600" cy="658368"/>
+            <a:off x="2999232" y="3364992"/>
+            <a:ext cx="1645920" cy="475488"/>
           </a:xfrm>
           <a:prstGeom prst="rect">
             <a:avLst/>
@@ -21822,15 +21579,186 @@
               <a:buNone/>
             </a:pPr>
             <a:r>
-              <a:rPr lang="en-US" sz="1100" b="1" dirty="0">
-                <a:solidFill>
-                  <a:srgbClr val="475569"/>
+              <a:rPr lang="en-US" sz="1400" b="1" dirty="0">
+                <a:solidFill>
+                  <a:srgbClr val="0D9488"/>
                 </a:solidFill>
                 <a:latin typeface="Trebuchet MS" pitchFamily="34" charset="0"/>
                 <a:ea typeface="Trebuchet MS" pitchFamily="34" charset="-122"/>
                 <a:cs typeface="Trebuchet MS" pitchFamily="34" charset="-120"/>
               </a:rPr>
-              <a:t>Syllables</a:t>
+              <a:t>learn</a:t>
+            </a:r>
+            <a:endParaRPr lang="en-US" sz="1400" dirty="0"/>
+          </a:p>
+        </p:txBody>
+      </p:sp>
+      <p:sp>
+        <p:nvSpPr>
+          <p:cNvPr id="27" name="Text 25"/>
+          <p:cNvSpPr/>
+          <p:nvPr/>
+        </p:nvSpPr>
+        <p:spPr>
+          <a:xfrm>
+            <a:off x="4645152" y="3364992"/>
+            <a:ext cx="1097280" cy="475488"/>
+          </a:xfrm>
+          <a:prstGeom prst="rect">
+            <a:avLst/>
+          </a:prstGeom>
+          <a:noFill/>
+          <a:ln/>
+        </p:spPr>
+        <p:txBody>
+          <a:bodyPr wrap="square" lIns="0" tIns="0" rIns="0" bIns="0" rtlCol="0" anchor="ctr"/>
+          <a:lstStyle/>
+          <a:p>
+            <a:pPr algn="ctr" indent="0" marL="0">
+              <a:buNone/>
+            </a:pPr>
+            <a:r>
+              <a:rPr lang="en-US" sz="1600" b="1" dirty="0">
+                <a:solidFill>
+                  <a:srgbClr val="0D9488"/>
+                </a:solidFill>
+                <a:latin typeface="Trebuchet MS" pitchFamily="34" charset="0"/>
+                <a:ea typeface="Trebuchet MS" pitchFamily="34" charset="-122"/>
+                <a:cs typeface="Trebuchet MS" pitchFamily="34" charset="-120"/>
+              </a:rPr>
+              <a:t>·</a:t>
+            </a:r>
+            <a:endParaRPr lang="en-US" sz="1600" dirty="0"/>
+          </a:p>
+        </p:txBody>
+      </p:sp>
+      <p:sp>
+        <p:nvSpPr>
+          <p:cNvPr id="28" name="Shape 26"/>
+          <p:cNvSpPr/>
+          <p:nvPr/>
+        </p:nvSpPr>
+        <p:spPr>
+          <a:xfrm>
+            <a:off x="5742432" y="3364992"/>
+            <a:ext cx="1645920" cy="475488"/>
+          </a:xfrm>
+          <a:prstGeom prst="rect">
+            <a:avLst>
+              <a:gd name="adj" fmla="val 9615"/>
+            </a:avLst>
+          </a:prstGeom>
+          <a:solidFill>
+            <a:srgbClr val="FFFFFF"/>
+          </a:solidFill>
+          <a:ln w="12700">
+            <a:solidFill>
+              <a:srgbClr val="0D9488"/>
+            </a:solidFill>
+            <a:prstDash val="solid"/>
+          </a:ln>
+        </p:spPr>
+      </p:sp>
+      <p:sp>
+        <p:nvSpPr>
+          <p:cNvPr id="29" name="Text 27"/>
+          <p:cNvSpPr/>
+          <p:nvPr/>
+        </p:nvSpPr>
+        <p:spPr>
+          <a:xfrm>
+            <a:off x="5742432" y="3364992"/>
+            <a:ext cx="1645920" cy="475488"/>
+          </a:xfrm>
+          <a:prstGeom prst="rect">
+            <a:avLst/>
+          </a:prstGeom>
+          <a:noFill/>
+          <a:ln/>
+        </p:spPr>
+        <p:txBody>
+          <a:bodyPr wrap="square" lIns="0" tIns="0" rIns="0" bIns="0" rtlCol="0" anchor="ctr"/>
+          <a:lstStyle/>
+          <a:p>
+            <a:pPr algn="ctr" indent="0" marL="0">
+              <a:buNone/>
+            </a:pPr>
+            <a:r>
+              <a:rPr lang="en-US" sz="1400" b="1" dirty="0">
+                <a:solidFill>
+                  <a:srgbClr val="0D9488"/>
+                </a:solidFill>
+                <a:latin typeface="Trebuchet MS" pitchFamily="34" charset="0"/>
+                <a:ea typeface="Trebuchet MS" pitchFamily="34" charset="-122"/>
+                <a:cs typeface="Trebuchet MS" pitchFamily="34" charset="-120"/>
+              </a:rPr>
+              <a:t>ers</a:t>
+            </a:r>
+            <a:endParaRPr lang="en-US" sz="1400" dirty="0"/>
+          </a:p>
+        </p:txBody>
+      </p:sp>
+      <p:sp>
+        <p:nvSpPr>
+          <p:cNvPr id="30" name="Shape 28"/>
+          <p:cNvSpPr/>
+          <p:nvPr/>
+        </p:nvSpPr>
+        <p:spPr>
+          <a:xfrm>
+            <a:off x="365760" y="4096512"/>
+            <a:ext cx="1371600" cy="804672"/>
+          </a:xfrm>
+          <a:prstGeom prst="rect">
+            <a:avLst>
+              <a:gd name="adj" fmla="val 6818"/>
+            </a:avLst>
+          </a:prstGeom>
+          <a:solidFill>
+            <a:srgbClr val="E2E8F0"/>
+          </a:solidFill>
+          <a:ln w="12700">
+            <a:solidFill>
+              <a:srgbClr val="E2E8F0"/>
+            </a:solidFill>
+            <a:prstDash val="solid"/>
+          </a:ln>
+        </p:spPr>
+      </p:sp>
+      <p:sp>
+        <p:nvSpPr>
+          <p:cNvPr id="31" name="Text 29"/>
+          <p:cNvSpPr/>
+          <p:nvPr/>
+        </p:nvSpPr>
+        <p:spPr>
+          <a:xfrm>
+            <a:off x="365760" y="4096512"/>
+            <a:ext cx="1371600" cy="804672"/>
+          </a:xfrm>
+          <a:prstGeom prst="rect">
+            <a:avLst/>
+          </a:prstGeom>
+          <a:noFill/>
+          <a:ln/>
+        </p:spPr>
+        <p:txBody>
+          <a:bodyPr wrap="square" lIns="0" tIns="0" rIns="0" bIns="0" rtlCol="0" anchor="ctr"/>
+          <a:lstStyle/>
+          <a:p>
+            <a:pPr algn="ctr" indent="0" marL="0">
+              <a:buNone/>
+            </a:pPr>
+            <a:r>
+              <a:rPr lang="en-US" sz="1100" b="1" dirty="0">
+                <a:solidFill>
+                  <a:srgbClr val="475569"/>
+                </a:solidFill>
+                <a:latin typeface="Trebuchet MS" pitchFamily="34" charset="0"/>
+                <a:ea typeface="Trebuchet MS" pitchFamily="34" charset="-122"/>
+                <a:cs typeface="Trebuchet MS" pitchFamily="34" charset="-120"/>
+              </a:rPr>
+              <a:t>Phonemes</a:t>
             </a:r>
             <a:endParaRPr lang="en-US" sz="1100" dirty="0"/>
           </a:p>
@@ -21838,13 +21766,13 @@
       </p:sp>
       <p:sp>
         <p:nvSpPr>
-          <p:cNvPr id="27" name="Shape 25"/>
-          <p:cNvSpPr/>
-          <p:nvPr/>
-        </p:nvSpPr>
-        <p:spPr>
-          <a:xfrm>
-            <a:off x="1874520" y="3273552"/>
+          <p:cNvPr id="32" name="Shape 30"/>
+          <p:cNvSpPr/>
+          <p:nvPr/>
+        </p:nvSpPr>
+        <p:spPr>
+          <a:xfrm>
+            <a:off x="1874520" y="4096512"/>
             <a:ext cx="6903720" cy="658368"/>
           </a:xfrm>
           <a:prstGeom prst="rect">
@@ -21853,30 +21781,30 @@
             </a:avLst>
           </a:prstGeom>
           <a:solidFill>
-            <a:srgbClr val="CCFBF1"/>
-          </a:solidFill>
-          <a:ln w="12700">
-            <a:solidFill>
-              <a:srgbClr val="0D9488"/>
-            </a:solidFill>
-            <a:prstDash val="solid"/>
-          </a:ln>
-        </p:spPr>
-      </p:sp>
-      <p:sp>
-        <p:nvSpPr>
-          <p:cNvPr id="28" name="Shape 26"/>
-          <p:cNvSpPr/>
-          <p:nvPr/>
-        </p:nvSpPr>
-        <p:spPr>
-          <a:xfrm>
-            <a:off x="2999232" y="3364992"/>
-            <a:ext cx="1645920" cy="475488"/>
+            <a:srgbClr val="FCE7F3"/>
+          </a:solidFill>
+          <a:ln w="12700">
+            <a:solidFill>
+              <a:srgbClr val="DB2777"/>
+            </a:solidFill>
+            <a:prstDash val="solid"/>
+          </a:ln>
+        </p:spPr>
+      </p:sp>
+      <p:sp>
+        <p:nvSpPr>
+          <p:cNvPr id="33" name="Shape 31"/>
+          <p:cNvSpPr/>
+          <p:nvPr/>
+        </p:nvSpPr>
+        <p:spPr>
+          <a:xfrm>
+            <a:off x="2427732" y="4169664"/>
+            <a:ext cx="685800" cy="475488"/>
           </a:xfrm>
           <a:prstGeom prst="rect">
             <a:avLst>
-              <a:gd name="adj" fmla="val 9615"/>
+              <a:gd name="adj" fmla="val 7692"/>
             </a:avLst>
           </a:prstGeom>
           <a:solidFill>
@@ -21884,22 +21812,22 @@
           </a:solidFill>
           <a:ln w="12700">
             <a:solidFill>
-              <a:srgbClr val="0D9488"/>
-            </a:solidFill>
-            <a:prstDash val="solid"/>
-          </a:ln>
-        </p:spPr>
-      </p:sp>
-      <p:sp>
-        <p:nvSpPr>
-          <p:cNvPr id="29" name="Text 27"/>
-          <p:cNvSpPr/>
-          <p:nvPr/>
-        </p:nvSpPr>
-        <p:spPr>
-          <a:xfrm>
-            <a:off x="2999232" y="3364992"/>
-            <a:ext cx="1645920" cy="475488"/>
+              <a:srgbClr val="DB2777"/>
+            </a:solidFill>
+            <a:prstDash val="solid"/>
+          </a:ln>
+        </p:spPr>
+      </p:sp>
+      <p:sp>
+        <p:nvSpPr>
+          <p:cNvPr id="34" name="Text 32"/>
+          <p:cNvSpPr/>
+          <p:nvPr/>
+        </p:nvSpPr>
+        <p:spPr>
+          <a:xfrm>
+            <a:off x="2427732" y="4169664"/>
+            <a:ext cx="685800" cy="475488"/>
           </a:xfrm>
           <a:prstGeom prst="rect">
             <a:avLst/>
@@ -21915,30 +21843,57 @@
               <a:buNone/>
             </a:pPr>
             <a:r>
-              <a:rPr lang="en-US" sz="1400" b="1" dirty="0">
-                <a:solidFill>
-                  <a:srgbClr val="0D9488"/>
+              <a:rPr lang="en-US" sz="900" b="1" dirty="0">
+                <a:solidFill>
+                  <a:srgbClr val="9D174D"/>
                 </a:solidFill>
                 <a:latin typeface="Trebuchet MS" pitchFamily="34" charset="0"/>
                 <a:ea typeface="Trebuchet MS" pitchFamily="34" charset="-122"/>
                 <a:cs typeface="Trebuchet MS" pitchFamily="34" charset="-120"/>
               </a:rPr>
-              <a:t>learn</a:t>
-            </a:r>
-            <a:endParaRPr lang="en-US" sz="1400" dirty="0"/>
-          </a:p>
-        </p:txBody>
-      </p:sp>
-      <p:sp>
-        <p:nvSpPr>
-          <p:cNvPr id="30" name="Text 28"/>
-          <p:cNvSpPr/>
-          <p:nvPr/>
-        </p:nvSpPr>
-        <p:spPr>
-          <a:xfrm>
-            <a:off x="4645152" y="3364992"/>
-            <a:ext cx="1097280" cy="475488"/>
+              <a:t>l</a:t>
+            </a:r>
+            <a:endParaRPr lang="en-US" sz="900" dirty="0"/>
+          </a:p>
+        </p:txBody>
+      </p:sp>
+      <p:sp>
+        <p:nvSpPr>
+          <p:cNvPr id="35" name="Shape 33"/>
+          <p:cNvSpPr/>
+          <p:nvPr/>
+        </p:nvSpPr>
+        <p:spPr>
+          <a:xfrm>
+            <a:off x="3639312" y="4169664"/>
+            <a:ext cx="685800" cy="475488"/>
+          </a:xfrm>
+          <a:prstGeom prst="rect">
+            <a:avLst>
+              <a:gd name="adj" fmla="val 7692"/>
+            </a:avLst>
+          </a:prstGeom>
+          <a:solidFill>
+            <a:srgbClr val="FFFFFF"/>
+          </a:solidFill>
+          <a:ln w="12700">
+            <a:solidFill>
+              <a:srgbClr val="DB2777"/>
+            </a:solidFill>
+            <a:prstDash val="solid"/>
+          </a:ln>
+        </p:spPr>
+      </p:sp>
+      <p:sp>
+        <p:nvSpPr>
+          <p:cNvPr id="36" name="Text 34"/>
+          <p:cNvSpPr/>
+          <p:nvPr/>
+        </p:nvSpPr>
+        <p:spPr>
+          <a:xfrm>
+            <a:off x="3639312" y="4169664"/>
+            <a:ext cx="685800" cy="475488"/>
           </a:xfrm>
           <a:prstGeom prst="rect">
             <a:avLst/>
@@ -21954,34 +21909,34 @@
               <a:buNone/>
             </a:pPr>
             <a:r>
-              <a:rPr lang="en-US" sz="1600" b="1" dirty="0">
-                <a:solidFill>
-                  <a:srgbClr val="0D9488"/>
+              <a:rPr lang="en-US" sz="900" b="1" dirty="0">
+                <a:solidFill>
+                  <a:srgbClr val="9D174D"/>
                 </a:solidFill>
                 <a:latin typeface="Trebuchet MS" pitchFamily="34" charset="0"/>
                 <a:ea typeface="Trebuchet MS" pitchFamily="34" charset="-122"/>
                 <a:cs typeface="Trebuchet MS" pitchFamily="34" charset="-120"/>
               </a:rPr>
-              <a:t>·</a:t>
-            </a:r>
-            <a:endParaRPr lang="en-US" sz="1600" dirty="0"/>
-          </a:p>
-        </p:txBody>
-      </p:sp>
-      <p:sp>
-        <p:nvSpPr>
-          <p:cNvPr id="31" name="Shape 29"/>
-          <p:cNvSpPr/>
-          <p:nvPr/>
-        </p:nvSpPr>
-        <p:spPr>
-          <a:xfrm>
-            <a:off x="5742432" y="3364992"/>
-            <a:ext cx="1645920" cy="475488"/>
+              <a:t>ear</a:t>
+            </a:r>
+            <a:endParaRPr lang="en-US" sz="900" dirty="0"/>
+          </a:p>
+        </p:txBody>
+      </p:sp>
+      <p:sp>
+        <p:nvSpPr>
+          <p:cNvPr id="37" name="Shape 35"/>
+          <p:cNvSpPr/>
+          <p:nvPr/>
+        </p:nvSpPr>
+        <p:spPr>
+          <a:xfrm>
+            <a:off x="4850892" y="4169664"/>
+            <a:ext cx="685800" cy="475488"/>
           </a:xfrm>
           <a:prstGeom prst="rect">
             <a:avLst>
-              <a:gd name="adj" fmla="val 9615"/>
+              <a:gd name="adj" fmla="val 7692"/>
             </a:avLst>
           </a:prstGeom>
           <a:solidFill>
@@ -21989,22 +21944,22 @@
           </a:solidFill>
           <a:ln w="12700">
             <a:solidFill>
-              <a:srgbClr val="0D9488"/>
-            </a:solidFill>
-            <a:prstDash val="solid"/>
-          </a:ln>
-        </p:spPr>
-      </p:sp>
-      <p:sp>
-        <p:nvSpPr>
-          <p:cNvPr id="32" name="Text 30"/>
-          <p:cNvSpPr/>
-          <p:nvPr/>
-        </p:nvSpPr>
-        <p:spPr>
-          <a:xfrm>
-            <a:off x="5742432" y="3364992"/>
-            <a:ext cx="1645920" cy="475488"/>
+              <a:srgbClr val="DB2777"/>
+            </a:solidFill>
+            <a:prstDash val="solid"/>
+          </a:ln>
+        </p:spPr>
+      </p:sp>
+      <p:sp>
+        <p:nvSpPr>
+          <p:cNvPr id="38" name="Text 36"/>
+          <p:cNvSpPr/>
+          <p:nvPr/>
+        </p:nvSpPr>
+        <p:spPr>
+          <a:xfrm>
+            <a:off x="4850892" y="4169664"/>
+            <a:ext cx="685800" cy="475488"/>
           </a:xfrm>
           <a:prstGeom prst="rect">
             <a:avLst/>
@@ -22020,57 +21975,57 @@
               <a:buNone/>
             </a:pPr>
             <a:r>
-              <a:rPr lang="en-US" sz="1400" b="1" dirty="0">
-                <a:solidFill>
-                  <a:srgbClr val="0D9488"/>
+              <a:rPr lang="en-US" sz="900" b="1" dirty="0">
+                <a:solidFill>
+                  <a:srgbClr val="9D174D"/>
                 </a:solidFill>
                 <a:latin typeface="Trebuchet MS" pitchFamily="34" charset="0"/>
                 <a:ea typeface="Trebuchet MS" pitchFamily="34" charset="-122"/>
                 <a:cs typeface="Trebuchet MS" pitchFamily="34" charset="-120"/>
               </a:rPr>
-              <a:t>ers</a:t>
-            </a:r>
-            <a:endParaRPr lang="en-US" sz="1400" dirty="0"/>
-          </a:p>
-        </p:txBody>
-      </p:sp>
-      <p:sp>
-        <p:nvSpPr>
-          <p:cNvPr id="33" name="Shape 31"/>
-          <p:cNvSpPr/>
-          <p:nvPr/>
-        </p:nvSpPr>
-        <p:spPr>
-          <a:xfrm>
-            <a:off x="365760" y="4096512"/>
-            <a:ext cx="1371600" cy="804672"/>
+              <a:t>n</a:t>
+            </a:r>
+            <a:endParaRPr lang="en-US" sz="900" dirty="0"/>
+          </a:p>
+        </p:txBody>
+      </p:sp>
+      <p:sp>
+        <p:nvSpPr>
+          <p:cNvPr id="39" name="Shape 37"/>
+          <p:cNvSpPr/>
+          <p:nvPr/>
+        </p:nvSpPr>
+        <p:spPr>
+          <a:xfrm>
+            <a:off x="6062472" y="4169664"/>
+            <a:ext cx="685800" cy="475488"/>
           </a:xfrm>
           <a:prstGeom prst="rect">
             <a:avLst>
-              <a:gd name="adj" fmla="val 6818"/>
+              <a:gd name="adj" fmla="val 7692"/>
             </a:avLst>
           </a:prstGeom>
           <a:solidFill>
-            <a:srgbClr val="E2E8F0"/>
-          </a:solidFill>
-          <a:ln w="12700">
-            <a:solidFill>
-              <a:srgbClr val="E2E8F0"/>
-            </a:solidFill>
-            <a:prstDash val="solid"/>
-          </a:ln>
-        </p:spPr>
-      </p:sp>
-      <p:sp>
-        <p:nvSpPr>
-          <p:cNvPr id="34" name="Text 32"/>
-          <p:cNvSpPr/>
-          <p:nvPr/>
-        </p:nvSpPr>
-        <p:spPr>
-          <a:xfrm>
-            <a:off x="365760" y="4096512"/>
-            <a:ext cx="1371600" cy="804672"/>
+            <a:srgbClr val="FFFFFF"/>
+          </a:solidFill>
+          <a:ln w="12700">
+            <a:solidFill>
+              <a:srgbClr val="DB2777"/>
+            </a:solidFill>
+            <a:prstDash val="solid"/>
+          </a:ln>
+        </p:spPr>
+      </p:sp>
+      <p:sp>
+        <p:nvSpPr>
+          <p:cNvPr id="40" name="Text 38"/>
+          <p:cNvSpPr/>
+          <p:nvPr/>
+        </p:nvSpPr>
+        <p:spPr>
+          <a:xfrm>
+            <a:off x="6062472" y="4169664"/>
+            <a:ext cx="685800" cy="475488"/>
           </a:xfrm>
           <a:prstGeom prst="rect">
             <a:avLst/>
@@ -22086,56 +22041,29 @@
               <a:buNone/>
             </a:pPr>
             <a:r>
-              <a:rPr lang="en-US" sz="1100" b="1" dirty="0">
-                <a:solidFill>
-                  <a:srgbClr val="475569"/>
+              <a:rPr lang="en-US" sz="900" b="1" dirty="0">
+                <a:solidFill>
+                  <a:srgbClr val="9D174D"/>
                 </a:solidFill>
                 <a:latin typeface="Trebuchet MS" pitchFamily="34" charset="0"/>
                 <a:ea typeface="Trebuchet MS" pitchFamily="34" charset="-122"/>
                 <a:cs typeface="Trebuchet MS" pitchFamily="34" charset="-120"/>
               </a:rPr>
-              <a:t>Phonemes</a:t>
-            </a:r>
-            <a:endParaRPr lang="en-US" sz="1100" dirty="0"/>
-          </a:p>
-        </p:txBody>
-      </p:sp>
-      <p:sp>
-        <p:nvSpPr>
-          <p:cNvPr id="35" name="Shape 33"/>
-          <p:cNvSpPr/>
-          <p:nvPr/>
-        </p:nvSpPr>
-        <p:spPr>
-          <a:xfrm>
-            <a:off x="1874520" y="4096512"/>
-            <a:ext cx="6903720" cy="658368"/>
-          </a:xfrm>
-          <a:prstGeom prst="rect">
-            <a:avLst>
-              <a:gd name="adj" fmla="val 8333"/>
-            </a:avLst>
-          </a:prstGeom>
-          <a:solidFill>
-            <a:srgbClr val="FCE7F3"/>
-          </a:solidFill>
-          <a:ln w="12700">
-            <a:solidFill>
-              <a:srgbClr val="DB2777"/>
-            </a:solidFill>
-            <a:prstDash val="solid"/>
-          </a:ln>
-        </p:spPr>
-      </p:sp>
-      <p:sp>
-        <p:nvSpPr>
-          <p:cNvPr id="36" name="Shape 34"/>
-          <p:cNvSpPr/>
-          <p:nvPr/>
-        </p:nvSpPr>
-        <p:spPr>
-          <a:xfrm>
-            <a:off x="2427732" y="4169664"/>
+              <a:t>er</a:t>
+            </a:r>
+            <a:endParaRPr lang="en-US" sz="900" dirty="0"/>
+          </a:p>
+        </p:txBody>
+      </p:sp>
+      <p:sp>
+        <p:nvSpPr>
+          <p:cNvPr id="41" name="Shape 39"/>
+          <p:cNvSpPr/>
+          <p:nvPr/>
+        </p:nvSpPr>
+        <p:spPr>
+          <a:xfrm>
+            <a:off x="7274052" y="4169664"/>
             <a:ext cx="685800" cy="475488"/>
           </a:xfrm>
           <a:prstGeom prst="rect">
@@ -22156,271 +22084,7 @@
       </p:sp>
       <p:sp>
         <p:nvSpPr>
-          <p:cNvPr id="37" name="Text 35"/>
-          <p:cNvSpPr/>
-          <p:nvPr/>
-        </p:nvSpPr>
-        <p:spPr>
-          <a:xfrm>
-            <a:off x="2427732" y="4169664"/>
-            <a:ext cx="685800" cy="475488"/>
-          </a:xfrm>
-          <a:prstGeom prst="rect">
-            <a:avLst/>
-          </a:prstGeom>
-          <a:noFill/>
-          <a:ln/>
-        </p:spPr>
-        <p:txBody>
-          <a:bodyPr wrap="square" lIns="0" tIns="0" rIns="0" bIns="0" rtlCol="0" anchor="ctr"/>
-          <a:lstStyle/>
-          <a:p>
-            <a:pPr algn="ctr" indent="0" marL="0">
-              <a:buNone/>
-            </a:pPr>
-            <a:r>
-              <a:rPr lang="en-US" sz="900" b="1" dirty="0">
-                <a:solidFill>
-                  <a:srgbClr val="9D174D"/>
-                </a:solidFill>
-                <a:latin typeface="Trebuchet MS" pitchFamily="34" charset="0"/>
-                <a:ea typeface="Trebuchet MS" pitchFamily="34" charset="-122"/>
-                <a:cs typeface="Trebuchet MS" pitchFamily="34" charset="-120"/>
-              </a:rPr>
-              <a:t>l</a:t>
-            </a:r>
-            <a:endParaRPr lang="en-US" sz="900" dirty="0"/>
-          </a:p>
-        </p:txBody>
-      </p:sp>
-      <p:sp>
-        <p:nvSpPr>
-          <p:cNvPr id="38" name="Shape 36"/>
-          <p:cNvSpPr/>
-          <p:nvPr/>
-        </p:nvSpPr>
-        <p:spPr>
-          <a:xfrm>
-            <a:off x="3639312" y="4169664"/>
-            <a:ext cx="685800" cy="475488"/>
-          </a:xfrm>
-          <a:prstGeom prst="rect">
-            <a:avLst>
-              <a:gd name="adj" fmla="val 7692"/>
-            </a:avLst>
-          </a:prstGeom>
-          <a:solidFill>
-            <a:srgbClr val="FFFFFF"/>
-          </a:solidFill>
-          <a:ln w="12700">
-            <a:solidFill>
-              <a:srgbClr val="DB2777"/>
-            </a:solidFill>
-            <a:prstDash val="solid"/>
-          </a:ln>
-        </p:spPr>
-      </p:sp>
-      <p:sp>
-        <p:nvSpPr>
-          <p:cNvPr id="39" name="Text 37"/>
-          <p:cNvSpPr/>
-          <p:nvPr/>
-        </p:nvSpPr>
-        <p:spPr>
-          <a:xfrm>
-            <a:off x="3639312" y="4169664"/>
-            <a:ext cx="685800" cy="475488"/>
-          </a:xfrm>
-          <a:prstGeom prst="rect">
-            <a:avLst/>
-          </a:prstGeom>
-          <a:noFill/>
-          <a:ln/>
-        </p:spPr>
-        <p:txBody>
-          <a:bodyPr wrap="square" lIns="0" tIns="0" rIns="0" bIns="0" rtlCol="0" anchor="ctr"/>
-          <a:lstStyle/>
-          <a:p>
-            <a:pPr algn="ctr" indent="0" marL="0">
-              <a:buNone/>
-            </a:pPr>
-            <a:r>
-              <a:rPr lang="en-US" sz="900" b="1" dirty="0">
-                <a:solidFill>
-                  <a:srgbClr val="9D174D"/>
-                </a:solidFill>
-                <a:latin typeface="Trebuchet MS" pitchFamily="34" charset="0"/>
-                <a:ea typeface="Trebuchet MS" pitchFamily="34" charset="-122"/>
-                <a:cs typeface="Trebuchet MS" pitchFamily="34" charset="-120"/>
-              </a:rPr>
-              <a:t>ear</a:t>
-            </a:r>
-            <a:endParaRPr lang="en-US" sz="900" dirty="0"/>
-          </a:p>
-        </p:txBody>
-      </p:sp>
-      <p:sp>
-        <p:nvSpPr>
-          <p:cNvPr id="40" name="Shape 38"/>
-          <p:cNvSpPr/>
-          <p:nvPr/>
-        </p:nvSpPr>
-        <p:spPr>
-          <a:xfrm>
-            <a:off x="4850892" y="4169664"/>
-            <a:ext cx="685800" cy="475488"/>
-          </a:xfrm>
-          <a:prstGeom prst="rect">
-            <a:avLst>
-              <a:gd name="adj" fmla="val 7692"/>
-            </a:avLst>
-          </a:prstGeom>
-          <a:solidFill>
-            <a:srgbClr val="FFFFFF"/>
-          </a:solidFill>
-          <a:ln w="12700">
-            <a:solidFill>
-              <a:srgbClr val="DB2777"/>
-            </a:solidFill>
-            <a:prstDash val="solid"/>
-          </a:ln>
-        </p:spPr>
-      </p:sp>
-      <p:sp>
-        <p:nvSpPr>
-          <p:cNvPr id="41" name="Text 39"/>
-          <p:cNvSpPr/>
-          <p:nvPr/>
-        </p:nvSpPr>
-        <p:spPr>
-          <a:xfrm>
-            <a:off x="4850892" y="4169664"/>
-            <a:ext cx="685800" cy="475488"/>
-          </a:xfrm>
-          <a:prstGeom prst="rect">
-            <a:avLst/>
-          </a:prstGeom>
-          <a:noFill/>
-          <a:ln/>
-        </p:spPr>
-        <p:txBody>
-          <a:bodyPr wrap="square" lIns="0" tIns="0" rIns="0" bIns="0" rtlCol="0" anchor="ctr"/>
-          <a:lstStyle/>
-          <a:p>
-            <a:pPr algn="ctr" indent="0" marL="0">
-              <a:buNone/>
-            </a:pPr>
-            <a:r>
-              <a:rPr lang="en-US" sz="900" b="1" dirty="0">
-                <a:solidFill>
-                  <a:srgbClr val="9D174D"/>
-                </a:solidFill>
-                <a:latin typeface="Trebuchet MS" pitchFamily="34" charset="0"/>
-                <a:ea typeface="Trebuchet MS" pitchFamily="34" charset="-122"/>
-                <a:cs typeface="Trebuchet MS" pitchFamily="34" charset="-120"/>
-              </a:rPr>
-              <a:t>n</a:t>
-            </a:r>
-            <a:endParaRPr lang="en-US" sz="900" dirty="0"/>
-          </a:p>
-        </p:txBody>
-      </p:sp>
-      <p:sp>
-        <p:nvSpPr>
-          <p:cNvPr id="42" name="Shape 40"/>
-          <p:cNvSpPr/>
-          <p:nvPr/>
-        </p:nvSpPr>
-        <p:spPr>
-          <a:xfrm>
-            <a:off x="6062472" y="4169664"/>
-            <a:ext cx="685800" cy="475488"/>
-          </a:xfrm>
-          <a:prstGeom prst="rect">
-            <a:avLst>
-              <a:gd name="adj" fmla="val 7692"/>
-            </a:avLst>
-          </a:prstGeom>
-          <a:solidFill>
-            <a:srgbClr val="FFFFFF"/>
-          </a:solidFill>
-          <a:ln w="12700">
-            <a:solidFill>
-              <a:srgbClr val="DB2777"/>
-            </a:solidFill>
-            <a:prstDash val="solid"/>
-          </a:ln>
-        </p:spPr>
-      </p:sp>
-      <p:sp>
-        <p:nvSpPr>
-          <p:cNvPr id="43" name="Text 41"/>
-          <p:cNvSpPr/>
-          <p:nvPr/>
-        </p:nvSpPr>
-        <p:spPr>
-          <a:xfrm>
-            <a:off x="6062472" y="4169664"/>
-            <a:ext cx="685800" cy="475488"/>
-          </a:xfrm>
-          <a:prstGeom prst="rect">
-            <a:avLst/>
-          </a:prstGeom>
-          <a:noFill/>
-          <a:ln/>
-        </p:spPr>
-        <p:txBody>
-          <a:bodyPr wrap="square" lIns="0" tIns="0" rIns="0" bIns="0" rtlCol="0" anchor="ctr"/>
-          <a:lstStyle/>
-          <a:p>
-            <a:pPr algn="ctr" indent="0" marL="0">
-              <a:buNone/>
-            </a:pPr>
-            <a:r>
-              <a:rPr lang="en-US" sz="900" b="1" dirty="0">
-                <a:solidFill>
-                  <a:srgbClr val="9D174D"/>
-                </a:solidFill>
-                <a:latin typeface="Trebuchet MS" pitchFamily="34" charset="0"/>
-                <a:ea typeface="Trebuchet MS" pitchFamily="34" charset="-122"/>
-                <a:cs typeface="Trebuchet MS" pitchFamily="34" charset="-120"/>
-              </a:rPr>
-              <a:t>er</a:t>
-            </a:r>
-            <a:endParaRPr lang="en-US" sz="900" dirty="0"/>
-          </a:p>
-        </p:txBody>
-      </p:sp>
-      <p:sp>
-        <p:nvSpPr>
-          <p:cNvPr id="44" name="Shape 42"/>
-          <p:cNvSpPr/>
-          <p:nvPr/>
-        </p:nvSpPr>
-        <p:spPr>
-          <a:xfrm>
-            <a:off x="7274052" y="4169664"/>
-            <a:ext cx="685800" cy="475488"/>
-          </a:xfrm>
-          <a:prstGeom prst="rect">
-            <a:avLst>
-              <a:gd name="adj" fmla="val 7692"/>
-            </a:avLst>
-          </a:prstGeom>
-          <a:solidFill>
-            <a:srgbClr val="FFFFFF"/>
-          </a:solidFill>
-          <a:ln w="12700">
-            <a:solidFill>
-              <a:srgbClr val="DB2777"/>
-            </a:solidFill>
-            <a:prstDash val="solid"/>
-          </a:ln>
-        </p:spPr>
-      </p:sp>
-      <p:sp>
-        <p:nvSpPr>
-          <p:cNvPr id="45" name="Text 43"/>
+          <p:cNvPr id="42" name="Text 40"/>
           <p:cNvSpPr/>
           <p:nvPr/>
         </p:nvSpPr>
@@ -22882,7 +22546,7 @@
                 <a:ea typeface="Trebuchet MS" pitchFamily="34" charset="-122"/>
                 <a:cs typeface="Trebuchet MS" pitchFamily="34" charset="-120"/>
               </a:rPr>
-              <a:t>relearned</a:t>
+              <a:t>self-learning</a:t>
             </a:r>
             <a:endParaRPr lang="en-US" sz="2800" dirty="0"/>
           </a:p>
@@ -23709,7 +23373,7 @@
                 <a:ea typeface="Trebuchet MS" pitchFamily="34" charset="-122"/>
                 <a:cs typeface="Trebuchet MS" pitchFamily="34" charset="-120"/>
               </a:rPr>
-              <a:t>relearned</a:t>
+              <a:t>self-learning</a:t>
             </a:r>
             <a:endParaRPr lang="en-US" sz="2800" dirty="0"/>
           </a:p>
@@ -23848,7 +23512,7 @@
                 <a:ea typeface="Trebuchet MS" pitchFamily="34" charset="-122"/>
                 <a:cs typeface="Trebuchet MS" pitchFamily="34" charset="-120"/>
               </a:rPr>
-              <a:t>re</a:t>
+              <a:t>self</a:t>
             </a:r>
             <a:endParaRPr lang="en-US" sz="1300" dirty="0"/>
           </a:p>
@@ -23887,7 +23551,7 @@
                 <a:ea typeface="Calibri" pitchFamily="34" charset="-122"/>
                 <a:cs typeface="Calibri" pitchFamily="34" charset="-120"/>
               </a:rPr>
-              <a:t>again</a:t>
+              <a:t>by oneself</a:t>
             </a:r>
             <a:endParaRPr lang="en-US" sz="850" dirty="0"/>
           </a:p>
@@ -24072,7 +23736,7 @@
                 <a:ea typeface="Trebuchet MS" pitchFamily="34" charset="-122"/>
                 <a:cs typeface="Trebuchet MS" pitchFamily="34" charset="-120"/>
               </a:rPr>
-              <a:t>ed</a:t>
+              <a:t>ing</a:t>
             </a:r>
             <a:endParaRPr lang="en-US" sz="1300" dirty="0"/>
           </a:p>
@@ -24111,7 +23775,7 @@
                 <a:ea typeface="Calibri" pitchFamily="34" charset="-122"/>
                 <a:cs typeface="Calibri" pitchFamily="34" charset="-120"/>
               </a:rPr>
-              <a:t>happened in the past</a:t>
+              <a:t>ongoing action</a:t>
             </a:r>
             <a:endParaRPr lang="en-US" sz="850" dirty="0"/>
           </a:p>
@@ -25525,7 +25189,7 @@
                 <a:ea typeface="Trebuchet MS" pitchFamily="34" charset="-122"/>
                 <a:cs typeface="Trebuchet MS" pitchFamily="34" charset="-120"/>
               </a:rPr>
-              <a:t>relearned</a:t>
+              <a:t>self-learning</a:t>
             </a:r>
             <a:endParaRPr lang="en-US" sz="2800" dirty="0"/>
           </a:p>
@@ -25664,7 +25328,7 @@
                 <a:ea typeface="Trebuchet MS" pitchFamily="34" charset="-122"/>
                 <a:cs typeface="Trebuchet MS" pitchFamily="34" charset="-120"/>
               </a:rPr>
-              <a:t>re</a:t>
+              <a:t>self</a:t>
             </a:r>
             <a:endParaRPr lang="en-US" sz="1300" dirty="0"/>
           </a:p>
@@ -25703,7 +25367,7 @@
                 <a:ea typeface="Calibri" pitchFamily="34" charset="-122"/>
                 <a:cs typeface="Calibri" pitchFamily="34" charset="-120"/>
               </a:rPr>
-              <a:t>again</a:t>
+              <a:t>by oneself</a:t>
             </a:r>
             <a:endParaRPr lang="en-US" sz="850" dirty="0"/>
           </a:p>
@@ -25888,7 +25552,7 @@
                 <a:ea typeface="Trebuchet MS" pitchFamily="34" charset="-122"/>
                 <a:cs typeface="Trebuchet MS" pitchFamily="34" charset="-120"/>
               </a:rPr>
-              <a:t>ed</a:t>
+              <a:t>ing</a:t>
             </a:r>
             <a:endParaRPr lang="en-US" sz="1300" dirty="0"/>
           </a:p>
@@ -25927,7 +25591,7 @@
                 <a:ea typeface="Calibri" pitchFamily="34" charset="-122"/>
                 <a:cs typeface="Calibri" pitchFamily="34" charset="-120"/>
               </a:rPr>
-              <a:t>happened in the past</a:t>
+              <a:t>ongoing action</a:t>
             </a:r>
             <a:endParaRPr lang="en-US" sz="850" dirty="0"/>
           </a:p>
@@ -26034,7 +25698,7 @@
         </p:nvSpPr>
         <p:spPr>
           <a:xfrm>
-            <a:off x="2999232" y="3364992"/>
+            <a:off x="2313432" y="3364992"/>
             <a:ext cx="1645920" cy="475488"/>
           </a:xfrm>
           <a:prstGeom prst="rect">
@@ -26061,7 +25725,7 @@
         </p:nvSpPr>
         <p:spPr>
           <a:xfrm>
-            <a:off x="2999232" y="3364992"/>
+            <a:off x="2313432" y="3364992"/>
             <a:ext cx="1645920" cy="475488"/>
           </a:xfrm>
           <a:prstGeom prst="rect">
@@ -26086,7 +25750,7 @@
                 <a:ea typeface="Trebuchet MS" pitchFamily="34" charset="-122"/>
                 <a:cs typeface="Trebuchet MS" pitchFamily="34" charset="-120"/>
               </a:rPr>
-              <a:t>re</a:t>
+              <a:t>self</a:t>
             </a:r>
             <a:endParaRPr lang="en-US" sz="1400" dirty="0"/>
           </a:p>
@@ -26100,8 +25764,8 @@
         </p:nvSpPr>
         <p:spPr>
           <a:xfrm>
-            <a:off x="4645152" y="3364992"/>
-            <a:ext cx="1097280" cy="475488"/>
+            <a:off x="3959352" y="3364992"/>
+            <a:ext cx="411480" cy="475488"/>
           </a:xfrm>
           <a:prstGeom prst="rect">
             <a:avLst/>
@@ -26139,7 +25803,7 @@
         </p:nvSpPr>
         <p:spPr>
           <a:xfrm>
-            <a:off x="5742432" y="3364992"/>
+            <a:off x="4370832" y="3364992"/>
             <a:ext cx="1645920" cy="475488"/>
           </a:xfrm>
           <a:prstGeom prst="rect">
@@ -26166,7 +25830,7 @@
         </p:nvSpPr>
         <p:spPr>
           <a:xfrm>
-            <a:off x="5742432" y="3364992"/>
+            <a:off x="4370832" y="3364992"/>
             <a:ext cx="1645920" cy="475488"/>
           </a:xfrm>
           <a:prstGeom prst="rect">
@@ -26191,7 +25855,7 @@
                 <a:ea typeface="Trebuchet MS" pitchFamily="34" charset="-122"/>
                 <a:cs typeface="Trebuchet MS" pitchFamily="34" charset="-120"/>
               </a:rPr>
-              <a:t>learned</a:t>
+              <a:t>learn</a:t>
             </a:r>
             <a:endParaRPr lang="en-US" sz="1400" dirty="0"/>
           </a:p>
@@ -26199,7 +25863,112 @@
       </p:sp>
       <p:sp>
         <p:nvSpPr>
-          <p:cNvPr id="33" name="Shape 31"/>
+          <p:cNvPr id="33" name="Text 31"/>
+          <p:cNvSpPr/>
+          <p:nvPr/>
+        </p:nvSpPr>
+        <p:spPr>
+          <a:xfrm>
+            <a:off x="6016752" y="3364992"/>
+            <a:ext cx="411480" cy="475488"/>
+          </a:xfrm>
+          <a:prstGeom prst="rect">
+            <a:avLst/>
+          </a:prstGeom>
+          <a:noFill/>
+          <a:ln/>
+        </p:spPr>
+        <p:txBody>
+          <a:bodyPr wrap="square" lIns="0" tIns="0" rIns="0" bIns="0" rtlCol="0" anchor="ctr"/>
+          <a:lstStyle/>
+          <a:p>
+            <a:pPr algn="ctr" indent="0" marL="0">
+              <a:buNone/>
+            </a:pPr>
+            <a:r>
+              <a:rPr lang="en-US" sz="1600" b="1" dirty="0">
+                <a:solidFill>
+                  <a:srgbClr val="0D9488"/>
+                </a:solidFill>
+                <a:latin typeface="Trebuchet MS" pitchFamily="34" charset="0"/>
+                <a:ea typeface="Trebuchet MS" pitchFamily="34" charset="-122"/>
+                <a:cs typeface="Trebuchet MS" pitchFamily="34" charset="-120"/>
+              </a:rPr>
+              <a:t>·</a:t>
+            </a:r>
+            <a:endParaRPr lang="en-US" sz="1600" dirty="0"/>
+          </a:p>
+        </p:txBody>
+      </p:sp>
+      <p:sp>
+        <p:nvSpPr>
+          <p:cNvPr id="34" name="Shape 32"/>
+          <p:cNvSpPr/>
+          <p:nvPr/>
+        </p:nvSpPr>
+        <p:spPr>
+          <a:xfrm>
+            <a:off x="6428232" y="3364992"/>
+            <a:ext cx="1645920" cy="475488"/>
+          </a:xfrm>
+          <a:prstGeom prst="rect">
+            <a:avLst>
+              <a:gd name="adj" fmla="val 9615"/>
+            </a:avLst>
+          </a:prstGeom>
+          <a:solidFill>
+            <a:srgbClr val="FFFFFF"/>
+          </a:solidFill>
+          <a:ln w="12700">
+            <a:solidFill>
+              <a:srgbClr val="0D9488"/>
+            </a:solidFill>
+            <a:prstDash val="solid"/>
+          </a:ln>
+        </p:spPr>
+      </p:sp>
+      <p:sp>
+        <p:nvSpPr>
+          <p:cNvPr id="35" name="Text 33"/>
+          <p:cNvSpPr/>
+          <p:nvPr/>
+        </p:nvSpPr>
+        <p:spPr>
+          <a:xfrm>
+            <a:off x="6428232" y="3364992"/>
+            <a:ext cx="1645920" cy="475488"/>
+          </a:xfrm>
+          <a:prstGeom prst="rect">
+            <a:avLst/>
+          </a:prstGeom>
+          <a:noFill/>
+          <a:ln/>
+        </p:spPr>
+        <p:txBody>
+          <a:bodyPr wrap="square" lIns="0" tIns="0" rIns="0" bIns="0" rtlCol="0" anchor="ctr"/>
+          <a:lstStyle/>
+          <a:p>
+            <a:pPr algn="ctr" indent="0" marL="0">
+              <a:buNone/>
+            </a:pPr>
+            <a:r>
+              <a:rPr lang="en-US" sz="1400" b="1" dirty="0">
+                <a:solidFill>
+                  <a:srgbClr val="0D9488"/>
+                </a:solidFill>
+                <a:latin typeface="Trebuchet MS" pitchFamily="34" charset="0"/>
+                <a:ea typeface="Trebuchet MS" pitchFamily="34" charset="-122"/>
+                <a:cs typeface="Trebuchet MS" pitchFamily="34" charset="-120"/>
+              </a:rPr>
+              <a:t>ing</a:t>
+            </a:r>
+            <a:endParaRPr lang="en-US" sz="1400" dirty="0"/>
+          </a:p>
+        </p:txBody>
+      </p:sp>
+      <p:sp>
+        <p:nvSpPr>
+          <p:cNvPr id="36" name="Shape 34"/>
           <p:cNvSpPr/>
           <p:nvPr/>
         </p:nvSpPr>
@@ -26226,7 +25995,7 @@
       </p:sp>
       <p:sp>
         <p:nvSpPr>
-          <p:cNvPr id="34" name="Text 32"/>
+          <p:cNvPr id="37" name="Text 35"/>
           <p:cNvSpPr/>
           <p:nvPr/>
         </p:nvSpPr>
@@ -26265,7 +26034,7 @@
       </p:sp>
       <p:sp>
         <p:nvSpPr>
-          <p:cNvPr id="35" name="Shape 33"/>
+          <p:cNvPr id="38" name="Shape 36"/>
           <p:cNvSpPr/>
           <p:nvPr/>
         </p:nvSpPr>
@@ -26292,7 +26061,7 @@
       </p:sp>
       <p:sp>
         <p:nvSpPr>
-          <p:cNvPr id="36" name="Text 34"/>
+          <p:cNvPr id="39" name="Text 37"/>
           <p:cNvSpPr/>
           <p:nvPr/>
         </p:nvSpPr>
@@ -26754,7 +26523,7 @@
                 <a:ea typeface="Trebuchet MS" pitchFamily="34" charset="-122"/>
                 <a:cs typeface="Trebuchet MS" pitchFamily="34" charset="-120"/>
               </a:rPr>
-              <a:t>relearned</a:t>
+              <a:t>self-learning</a:t>
             </a:r>
             <a:endParaRPr lang="en-US" sz="2800" dirty="0"/>
           </a:p>
@@ -26893,7 +26662,7 @@
                 <a:ea typeface="Trebuchet MS" pitchFamily="34" charset="-122"/>
                 <a:cs typeface="Trebuchet MS" pitchFamily="34" charset="-120"/>
               </a:rPr>
-              <a:t>re</a:t>
+              <a:t>self</a:t>
             </a:r>
             <a:endParaRPr lang="en-US" sz="1300" dirty="0"/>
           </a:p>
@@ -26932,7 +26701,7 @@
                 <a:ea typeface="Calibri" pitchFamily="34" charset="-122"/>
                 <a:cs typeface="Calibri" pitchFamily="34" charset="-120"/>
               </a:rPr>
-              <a:t>again</a:t>
+              <a:t>by oneself</a:t>
             </a:r>
             <a:endParaRPr lang="en-US" sz="850" dirty="0"/>
           </a:p>
@@ -27117,7 +26886,7 @@
                 <a:ea typeface="Trebuchet MS" pitchFamily="34" charset="-122"/>
                 <a:cs typeface="Trebuchet MS" pitchFamily="34" charset="-120"/>
               </a:rPr>
-              <a:t>ed</a:t>
+              <a:t>ing</a:t>
             </a:r>
             <a:endParaRPr lang="en-US" sz="1300" dirty="0"/>
           </a:p>
@@ -27156,7 +26925,7 @@
                 <a:ea typeface="Calibri" pitchFamily="34" charset="-122"/>
                 <a:cs typeface="Calibri" pitchFamily="34" charset="-120"/>
               </a:rPr>
-              <a:t>happened in the past</a:t>
+              <a:t>ongoing action</a:t>
             </a:r>
             <a:endParaRPr lang="en-US" sz="850" dirty="0"/>
           </a:p>
@@ -27263,7 +27032,7 @@
         </p:nvSpPr>
         <p:spPr>
           <a:xfrm>
-            <a:off x="2999232" y="3364992"/>
+            <a:off x="2313432" y="3364992"/>
             <a:ext cx="1645920" cy="475488"/>
           </a:xfrm>
           <a:prstGeom prst="rect">
@@ -27290,7 +27059,7 @@
         </p:nvSpPr>
         <p:spPr>
           <a:xfrm>
-            <a:off x="2999232" y="3364992"/>
+            <a:off x="2313432" y="3364992"/>
             <a:ext cx="1645920" cy="475488"/>
           </a:xfrm>
           <a:prstGeom prst="rect">
@@ -27315,7 +27084,7 @@
                 <a:ea typeface="Trebuchet MS" pitchFamily="34" charset="-122"/>
                 <a:cs typeface="Trebuchet MS" pitchFamily="34" charset="-120"/>
               </a:rPr>
-              <a:t>re</a:t>
+              <a:t>self</a:t>
             </a:r>
             <a:endParaRPr lang="en-US" sz="1400" dirty="0"/>
           </a:p>
@@ -27329,8 +27098,8 @@
         </p:nvSpPr>
         <p:spPr>
           <a:xfrm>
-            <a:off x="4645152" y="3364992"/>
-            <a:ext cx="1097280" cy="475488"/>
+            <a:off x="3959352" y="3364992"/>
+            <a:ext cx="411480" cy="475488"/>
           </a:xfrm>
           <a:prstGeom prst="rect">
             <a:avLst/>
@@ -27368,7 +27137,7 @@
         </p:nvSpPr>
         <p:spPr>
           <a:xfrm>
-            <a:off x="5742432" y="3364992"/>
+            <a:off x="4370832" y="3364992"/>
             <a:ext cx="1645920" cy="475488"/>
           </a:xfrm>
           <a:prstGeom prst="rect">
@@ -27395,7 +27164,7 @@
         </p:nvSpPr>
         <p:spPr>
           <a:xfrm>
-            <a:off x="5742432" y="3364992"/>
+            <a:off x="4370832" y="3364992"/>
             <a:ext cx="1645920" cy="475488"/>
           </a:xfrm>
           <a:prstGeom prst="rect">
@@ -27420,7 +27189,7 @@
                 <a:ea typeface="Trebuchet MS" pitchFamily="34" charset="-122"/>
                 <a:cs typeface="Trebuchet MS" pitchFamily="34" charset="-120"/>
               </a:rPr>
-              <a:t>learned</a:t>
+              <a:t>learn</a:t>
             </a:r>
             <a:endParaRPr lang="en-US" sz="1400" dirty="0"/>
           </a:p>
@@ -27428,7 +27197,112 @@
       </p:sp>
       <p:sp>
         <p:nvSpPr>
-          <p:cNvPr id="33" name="Shape 31"/>
+          <p:cNvPr id="33" name="Text 31"/>
+          <p:cNvSpPr/>
+          <p:nvPr/>
+        </p:nvSpPr>
+        <p:spPr>
+          <a:xfrm>
+            <a:off x="6016752" y="3364992"/>
+            <a:ext cx="411480" cy="475488"/>
+          </a:xfrm>
+          <a:prstGeom prst="rect">
+            <a:avLst/>
+          </a:prstGeom>
+          <a:noFill/>
+          <a:ln/>
+        </p:spPr>
+        <p:txBody>
+          <a:bodyPr wrap="square" lIns="0" tIns="0" rIns="0" bIns="0" rtlCol="0" anchor="ctr"/>
+          <a:lstStyle/>
+          <a:p>
+            <a:pPr algn="ctr" indent="0" marL="0">
+              <a:buNone/>
+            </a:pPr>
+            <a:r>
+              <a:rPr lang="en-US" sz="1600" b="1" dirty="0">
+                <a:solidFill>
+                  <a:srgbClr val="0D9488"/>
+                </a:solidFill>
+                <a:latin typeface="Trebuchet MS" pitchFamily="34" charset="0"/>
+                <a:ea typeface="Trebuchet MS" pitchFamily="34" charset="-122"/>
+                <a:cs typeface="Trebuchet MS" pitchFamily="34" charset="-120"/>
+              </a:rPr>
+              <a:t>·</a:t>
+            </a:r>
+            <a:endParaRPr lang="en-US" sz="1600" dirty="0"/>
+          </a:p>
+        </p:txBody>
+      </p:sp>
+      <p:sp>
+        <p:nvSpPr>
+          <p:cNvPr id="34" name="Shape 32"/>
+          <p:cNvSpPr/>
+          <p:nvPr/>
+        </p:nvSpPr>
+        <p:spPr>
+          <a:xfrm>
+            <a:off x="6428232" y="3364992"/>
+            <a:ext cx="1645920" cy="475488"/>
+          </a:xfrm>
+          <a:prstGeom prst="rect">
+            <a:avLst>
+              <a:gd name="adj" fmla="val 9615"/>
+            </a:avLst>
+          </a:prstGeom>
+          <a:solidFill>
+            <a:srgbClr val="FFFFFF"/>
+          </a:solidFill>
+          <a:ln w="12700">
+            <a:solidFill>
+              <a:srgbClr val="0D9488"/>
+            </a:solidFill>
+            <a:prstDash val="solid"/>
+          </a:ln>
+        </p:spPr>
+      </p:sp>
+      <p:sp>
+        <p:nvSpPr>
+          <p:cNvPr id="35" name="Text 33"/>
+          <p:cNvSpPr/>
+          <p:nvPr/>
+        </p:nvSpPr>
+        <p:spPr>
+          <a:xfrm>
+            <a:off x="6428232" y="3364992"/>
+            <a:ext cx="1645920" cy="475488"/>
+          </a:xfrm>
+          <a:prstGeom prst="rect">
+            <a:avLst/>
+          </a:prstGeom>
+          <a:noFill/>
+          <a:ln/>
+        </p:spPr>
+        <p:txBody>
+          <a:bodyPr wrap="square" lIns="0" tIns="0" rIns="0" bIns="0" rtlCol="0" anchor="ctr"/>
+          <a:lstStyle/>
+          <a:p>
+            <a:pPr algn="ctr" indent="0" marL="0">
+              <a:buNone/>
+            </a:pPr>
+            <a:r>
+              <a:rPr lang="en-US" sz="1400" b="1" dirty="0">
+                <a:solidFill>
+                  <a:srgbClr val="0D9488"/>
+                </a:solidFill>
+                <a:latin typeface="Trebuchet MS" pitchFamily="34" charset="0"/>
+                <a:ea typeface="Trebuchet MS" pitchFamily="34" charset="-122"/>
+                <a:cs typeface="Trebuchet MS" pitchFamily="34" charset="-120"/>
+              </a:rPr>
+              <a:t>ing</a:t>
+            </a:r>
+            <a:endParaRPr lang="en-US" sz="1400" dirty="0"/>
+          </a:p>
+        </p:txBody>
+      </p:sp>
+      <p:sp>
+        <p:nvSpPr>
+          <p:cNvPr id="36" name="Shape 34"/>
           <p:cNvSpPr/>
           <p:nvPr/>
         </p:nvSpPr>
@@ -27455,7 +27329,7 @@
       </p:sp>
       <p:sp>
         <p:nvSpPr>
-          <p:cNvPr id="34" name="Text 32"/>
+          <p:cNvPr id="37" name="Text 35"/>
           <p:cNvSpPr/>
           <p:nvPr/>
         </p:nvSpPr>
@@ -27494,7 +27368,7 @@
       </p:sp>
       <p:sp>
         <p:nvSpPr>
-          <p:cNvPr id="35" name="Shape 33"/>
+          <p:cNvPr id="38" name="Shape 36"/>
           <p:cNvSpPr/>
           <p:nvPr/>
         </p:nvSpPr>
@@ -27521,13 +27395,13 @@
       </p:sp>
       <p:sp>
         <p:nvSpPr>
-          <p:cNvPr id="36" name="Shape 34"/>
-          <p:cNvSpPr/>
-          <p:nvPr/>
-        </p:nvSpPr>
-        <p:spPr>
-          <a:xfrm>
-            <a:off x="2254649" y="4169664"/>
+          <p:cNvPr id="39" name="Shape 37"/>
+          <p:cNvSpPr/>
+          <p:nvPr/>
+        </p:nvSpPr>
+        <p:spPr>
+          <a:xfrm>
+            <a:off x="2023872" y="4169664"/>
             <a:ext cx="685800" cy="475488"/>
           </a:xfrm>
           <a:prstGeom prst="rect">
@@ -27548,13 +27422,13 @@
       </p:sp>
       <p:sp>
         <p:nvSpPr>
-          <p:cNvPr id="37" name="Text 35"/>
-          <p:cNvSpPr/>
-          <p:nvPr/>
-        </p:nvSpPr>
-        <p:spPr>
-          <a:xfrm>
-            <a:off x="2254649" y="4169664"/>
+          <p:cNvPr id="40" name="Text 38"/>
+          <p:cNvSpPr/>
+          <p:nvPr/>
+        </p:nvSpPr>
+        <p:spPr>
+          <a:xfrm>
+            <a:off x="2023872" y="4169664"/>
             <a:ext cx="685800" cy="475488"/>
           </a:xfrm>
           <a:prstGeom prst="rect">
@@ -27579,7 +27453,7 @@
                 <a:ea typeface="Trebuchet MS" pitchFamily="34" charset="-122"/>
                 <a:cs typeface="Trebuchet MS" pitchFamily="34" charset="-120"/>
               </a:rPr>
-              <a:t>r</a:t>
+              <a:t>s</a:t>
             </a:r>
             <a:endParaRPr lang="en-US" sz="900" dirty="0"/>
           </a:p>
@@ -27587,13 +27461,13 @@
       </p:sp>
       <p:sp>
         <p:nvSpPr>
-          <p:cNvPr id="38" name="Shape 36"/>
-          <p:cNvSpPr/>
-          <p:nvPr/>
-        </p:nvSpPr>
-        <p:spPr>
-          <a:xfrm>
-            <a:off x="3293146" y="4169664"/>
+          <p:cNvPr id="41" name="Shape 39"/>
+          <p:cNvSpPr/>
+          <p:nvPr/>
+        </p:nvSpPr>
+        <p:spPr>
+          <a:xfrm>
+            <a:off x="2831592" y="4169664"/>
             <a:ext cx="685800" cy="475488"/>
           </a:xfrm>
           <a:prstGeom prst="rect">
@@ -27614,13 +27488,13 @@
       </p:sp>
       <p:sp>
         <p:nvSpPr>
-          <p:cNvPr id="39" name="Text 37"/>
-          <p:cNvSpPr/>
-          <p:nvPr/>
-        </p:nvSpPr>
-        <p:spPr>
-          <a:xfrm>
-            <a:off x="3293146" y="4169664"/>
+          <p:cNvPr id="42" name="Text 40"/>
+          <p:cNvSpPr/>
+          <p:nvPr/>
+        </p:nvSpPr>
+        <p:spPr>
+          <a:xfrm>
+            <a:off x="2831592" y="4169664"/>
             <a:ext cx="685800" cy="475488"/>
           </a:xfrm>
           <a:prstGeom prst="rect">
@@ -27653,13 +27527,13 @@
       </p:sp>
       <p:sp>
         <p:nvSpPr>
-          <p:cNvPr id="40" name="Shape 38"/>
-          <p:cNvSpPr/>
-          <p:nvPr/>
-        </p:nvSpPr>
-        <p:spPr>
-          <a:xfrm>
-            <a:off x="4331643" y="4169664"/>
+          <p:cNvPr id="43" name="Shape 41"/>
+          <p:cNvSpPr/>
+          <p:nvPr/>
+        </p:nvSpPr>
+        <p:spPr>
+          <a:xfrm>
+            <a:off x="3639312" y="4169664"/>
             <a:ext cx="685800" cy="475488"/>
           </a:xfrm>
           <a:prstGeom prst="rect">
@@ -27680,13 +27554,13 @@
       </p:sp>
       <p:sp>
         <p:nvSpPr>
-          <p:cNvPr id="41" name="Text 39"/>
-          <p:cNvSpPr/>
-          <p:nvPr/>
-        </p:nvSpPr>
-        <p:spPr>
-          <a:xfrm>
-            <a:off x="4331643" y="4169664"/>
+          <p:cNvPr id="44" name="Text 42"/>
+          <p:cNvSpPr/>
+          <p:nvPr/>
+        </p:nvSpPr>
+        <p:spPr>
+          <a:xfrm>
+            <a:off x="3639312" y="4169664"/>
             <a:ext cx="685800" cy="475488"/>
           </a:xfrm>
           <a:prstGeom prst="rect">
@@ -27719,13 +27593,13 @@
       </p:sp>
       <p:sp>
         <p:nvSpPr>
-          <p:cNvPr id="42" name="Shape 40"/>
-          <p:cNvSpPr/>
-          <p:nvPr/>
-        </p:nvSpPr>
-        <p:spPr>
-          <a:xfrm>
-            <a:off x="5370141" y="4169664"/>
+          <p:cNvPr id="45" name="Shape 43"/>
+          <p:cNvSpPr/>
+          <p:nvPr/>
+        </p:nvSpPr>
+        <p:spPr>
+          <a:xfrm>
+            <a:off x="4447032" y="4169664"/>
             <a:ext cx="685800" cy="475488"/>
           </a:xfrm>
           <a:prstGeom prst="rect">
@@ -27746,13 +27620,13 @@
       </p:sp>
       <p:sp>
         <p:nvSpPr>
-          <p:cNvPr id="43" name="Text 41"/>
-          <p:cNvSpPr/>
-          <p:nvPr/>
-        </p:nvSpPr>
-        <p:spPr>
-          <a:xfrm>
-            <a:off x="5370141" y="4169664"/>
+          <p:cNvPr id="46" name="Text 44"/>
+          <p:cNvSpPr/>
+          <p:nvPr/>
+        </p:nvSpPr>
+        <p:spPr>
+          <a:xfrm>
+            <a:off x="4447032" y="4169664"/>
             <a:ext cx="685800" cy="475488"/>
           </a:xfrm>
           <a:prstGeom prst="rect">
@@ -27777,7 +27651,7 @@
                 <a:ea typeface="Trebuchet MS" pitchFamily="34" charset="-122"/>
                 <a:cs typeface="Trebuchet MS" pitchFamily="34" charset="-120"/>
               </a:rPr>
-              <a:t>ear</a:t>
+              <a:t>f</a:t>
             </a:r>
             <a:endParaRPr lang="en-US" sz="900" dirty="0"/>
           </a:p>
@@ -27785,13 +27659,13 @@
       </p:sp>
       <p:sp>
         <p:nvSpPr>
-          <p:cNvPr id="44" name="Shape 42"/>
-          <p:cNvSpPr/>
-          <p:nvPr/>
-        </p:nvSpPr>
-        <p:spPr>
-          <a:xfrm>
-            <a:off x="6408638" y="4169664"/>
+          <p:cNvPr id="47" name="Shape 45"/>
+          <p:cNvSpPr/>
+          <p:nvPr/>
+        </p:nvSpPr>
+        <p:spPr>
+          <a:xfrm>
+            <a:off x="5254752" y="4169664"/>
             <a:ext cx="685800" cy="475488"/>
           </a:xfrm>
           <a:prstGeom prst="rect">
@@ -27812,13 +27686,13 @@
       </p:sp>
       <p:sp>
         <p:nvSpPr>
-          <p:cNvPr id="45" name="Text 43"/>
-          <p:cNvSpPr/>
-          <p:nvPr/>
-        </p:nvSpPr>
-        <p:spPr>
-          <a:xfrm>
-            <a:off x="6408638" y="4169664"/>
+          <p:cNvPr id="48" name="Text 46"/>
+          <p:cNvSpPr/>
+          <p:nvPr/>
+        </p:nvSpPr>
+        <p:spPr>
+          <a:xfrm>
+            <a:off x="5254752" y="4169664"/>
             <a:ext cx="685800" cy="475488"/>
           </a:xfrm>
           <a:prstGeom prst="rect">
@@ -27843,7 +27717,7 @@
                 <a:ea typeface="Trebuchet MS" pitchFamily="34" charset="-122"/>
                 <a:cs typeface="Trebuchet MS" pitchFamily="34" charset="-120"/>
               </a:rPr>
-              <a:t>n</a:t>
+              <a:t>l</a:t>
             </a:r>
             <a:endParaRPr lang="en-US" sz="900" dirty="0"/>
           </a:p>
@@ -27851,13 +27725,13 @@
       </p:sp>
       <p:sp>
         <p:nvSpPr>
-          <p:cNvPr id="46" name="Shape 44"/>
-          <p:cNvSpPr/>
-          <p:nvPr/>
-        </p:nvSpPr>
-        <p:spPr>
-          <a:xfrm>
-            <a:off x="7447135" y="4169664"/>
+          <p:cNvPr id="49" name="Shape 47"/>
+          <p:cNvSpPr/>
+          <p:nvPr/>
+        </p:nvSpPr>
+        <p:spPr>
+          <a:xfrm>
+            <a:off x="6062472" y="4169664"/>
             <a:ext cx="685800" cy="475488"/>
           </a:xfrm>
           <a:prstGeom prst="rect">
@@ -27878,13 +27752,13 @@
       </p:sp>
       <p:sp>
         <p:nvSpPr>
-          <p:cNvPr id="47" name="Text 45"/>
-          <p:cNvSpPr/>
-          <p:nvPr/>
-        </p:nvSpPr>
-        <p:spPr>
-          <a:xfrm>
-            <a:off x="7447135" y="4169664"/>
+          <p:cNvPr id="50" name="Text 48"/>
+          <p:cNvSpPr/>
+          <p:nvPr/>
+        </p:nvSpPr>
+        <p:spPr>
+          <a:xfrm>
+            <a:off x="6062472" y="4169664"/>
             <a:ext cx="685800" cy="475488"/>
           </a:xfrm>
           <a:prstGeom prst="rect">
@@ -27909,7 +27783,139 @@
                 <a:ea typeface="Trebuchet MS" pitchFamily="34" charset="-122"/>
                 <a:cs typeface="Trebuchet MS" pitchFamily="34" charset="-120"/>
               </a:rPr>
-              <a:t>ed</a:t>
+              <a:t>ear</a:t>
+            </a:r>
+            <a:endParaRPr lang="en-US" sz="900" dirty="0"/>
+          </a:p>
+        </p:txBody>
+      </p:sp>
+      <p:sp>
+        <p:nvSpPr>
+          <p:cNvPr id="51" name="Shape 49"/>
+          <p:cNvSpPr/>
+          <p:nvPr/>
+        </p:nvSpPr>
+        <p:spPr>
+          <a:xfrm>
+            <a:off x="6870192" y="4169664"/>
+            <a:ext cx="685800" cy="475488"/>
+          </a:xfrm>
+          <a:prstGeom prst="rect">
+            <a:avLst>
+              <a:gd name="adj" fmla="val 7692"/>
+            </a:avLst>
+          </a:prstGeom>
+          <a:solidFill>
+            <a:srgbClr val="FFFFFF"/>
+          </a:solidFill>
+          <a:ln w="12700">
+            <a:solidFill>
+              <a:srgbClr val="DB2777"/>
+            </a:solidFill>
+            <a:prstDash val="solid"/>
+          </a:ln>
+        </p:spPr>
+      </p:sp>
+      <p:sp>
+        <p:nvSpPr>
+          <p:cNvPr id="52" name="Text 50"/>
+          <p:cNvSpPr/>
+          <p:nvPr/>
+        </p:nvSpPr>
+        <p:spPr>
+          <a:xfrm>
+            <a:off x="6870192" y="4169664"/>
+            <a:ext cx="685800" cy="475488"/>
+          </a:xfrm>
+          <a:prstGeom prst="rect">
+            <a:avLst/>
+          </a:prstGeom>
+          <a:noFill/>
+          <a:ln/>
+        </p:spPr>
+        <p:txBody>
+          <a:bodyPr wrap="square" lIns="0" tIns="0" rIns="0" bIns="0" rtlCol="0" anchor="ctr"/>
+          <a:lstStyle/>
+          <a:p>
+            <a:pPr algn="ctr" indent="0" marL="0">
+              <a:buNone/>
+            </a:pPr>
+            <a:r>
+              <a:rPr lang="en-US" sz="900" b="1" dirty="0">
+                <a:solidFill>
+                  <a:srgbClr val="9D174D"/>
+                </a:solidFill>
+                <a:latin typeface="Trebuchet MS" pitchFamily="34" charset="0"/>
+                <a:ea typeface="Trebuchet MS" pitchFamily="34" charset="-122"/>
+                <a:cs typeface="Trebuchet MS" pitchFamily="34" charset="-120"/>
+              </a:rPr>
+              <a:t>n</a:t>
+            </a:r>
+            <a:endParaRPr lang="en-US" sz="900" dirty="0"/>
+          </a:p>
+        </p:txBody>
+      </p:sp>
+      <p:sp>
+        <p:nvSpPr>
+          <p:cNvPr id="53" name="Shape 51"/>
+          <p:cNvSpPr/>
+          <p:nvPr/>
+        </p:nvSpPr>
+        <p:spPr>
+          <a:xfrm>
+            <a:off x="7677912" y="4169664"/>
+            <a:ext cx="685800" cy="475488"/>
+          </a:xfrm>
+          <a:prstGeom prst="rect">
+            <a:avLst>
+              <a:gd name="adj" fmla="val 7692"/>
+            </a:avLst>
+          </a:prstGeom>
+          <a:solidFill>
+            <a:srgbClr val="FFFFFF"/>
+          </a:solidFill>
+          <a:ln w="12700">
+            <a:solidFill>
+              <a:srgbClr val="DB2777"/>
+            </a:solidFill>
+            <a:prstDash val="solid"/>
+          </a:ln>
+        </p:spPr>
+      </p:sp>
+      <p:sp>
+        <p:nvSpPr>
+          <p:cNvPr id="54" name="Text 52"/>
+          <p:cNvSpPr/>
+          <p:nvPr/>
+        </p:nvSpPr>
+        <p:spPr>
+          <a:xfrm>
+            <a:off x="7677912" y="4169664"/>
+            <a:ext cx="685800" cy="475488"/>
+          </a:xfrm>
+          <a:prstGeom prst="rect">
+            <a:avLst/>
+          </a:prstGeom>
+          <a:noFill/>
+          <a:ln/>
+        </p:spPr>
+        <p:txBody>
+          <a:bodyPr wrap="square" lIns="0" tIns="0" rIns="0" bIns="0" rtlCol="0" anchor="ctr"/>
+          <a:lstStyle/>
+          <a:p>
+            <a:pPr algn="ctr" indent="0" marL="0">
+              <a:buNone/>
+            </a:pPr>
+            <a:r>
+              <a:rPr lang="en-US" sz="900" b="1" dirty="0">
+                <a:solidFill>
+                  <a:srgbClr val="9D174D"/>
+                </a:solidFill>
+                <a:latin typeface="Trebuchet MS" pitchFamily="34" charset="0"/>
+                <a:ea typeface="Trebuchet MS" pitchFamily="34" charset="-122"/>
+                <a:cs typeface="Trebuchet MS" pitchFamily="34" charset="-120"/>
+              </a:rPr>
+              <a:t>ing</a:t>
             </a:r>
             <a:endParaRPr lang="en-US" sz="900" dirty="0"/>
           </a:p>
@@ -29457,7 +29463,7 @@
                 <a:ea typeface="Calibri" pitchFamily="34" charset="-122"/>
                 <a:cs typeface="Calibri" pitchFamily="34" charset="-120"/>
               </a:rPr>
-              <a:t>having a quality or describing a person</a:t>
+              <a:t>in the past</a:t>
             </a:r>
             <a:endParaRPr lang="en-US" sz="850" dirty="0"/>
           </a:p>
@@ -30442,7 +30448,7 @@
                 <a:ea typeface="Calibri" pitchFamily="34" charset="-122"/>
                 <a:cs typeface="Calibri" pitchFamily="34" charset="-120"/>
               </a:rPr>
-              <a:t>having a quality or describing a person</a:t>
+              <a:t>in the past</a:t>
             </a:r>
             <a:endParaRPr lang="en-US" sz="850" dirty="0"/>
           </a:p>
@@ -30549,7 +30555,7 @@
         </p:nvSpPr>
         <p:spPr>
           <a:xfrm>
-            <a:off x="2999232" y="3364992"/>
+            <a:off x="4370832" y="3364992"/>
             <a:ext cx="1645920" cy="475488"/>
           </a:xfrm>
           <a:prstGeom prst="rect">
@@ -30576,7 +30582,7 @@
         </p:nvSpPr>
         <p:spPr>
           <a:xfrm>
-            <a:off x="2999232" y="3364992"/>
+            <a:off x="4370832" y="3364992"/>
             <a:ext cx="1645920" cy="475488"/>
           </a:xfrm>
           <a:prstGeom prst="rect">
@@ -30601,7 +30607,7 @@
                 <a:ea typeface="Trebuchet MS" pitchFamily="34" charset="-122"/>
                 <a:cs typeface="Trebuchet MS" pitchFamily="34" charset="-120"/>
               </a:rPr>
-              <a:t>learn</a:t>
+              <a:t>learned</a:t>
             </a:r>
             <a:endParaRPr lang="en-US" sz="1400" dirty="0"/>
           </a:p>
@@ -30609,14 +30615,41 @@
       </p:sp>
       <p:sp>
         <p:nvSpPr>
-          <p:cNvPr id="27" name="Text 25"/>
-          <p:cNvSpPr/>
-          <p:nvPr/>
-        </p:nvSpPr>
-        <p:spPr>
-          <a:xfrm>
-            <a:off x="4645152" y="3364992"/>
-            <a:ext cx="1097280" cy="475488"/>
+          <p:cNvPr id="27" name="Shape 25"/>
+          <p:cNvSpPr/>
+          <p:nvPr/>
+        </p:nvSpPr>
+        <p:spPr>
+          <a:xfrm>
+            <a:off x="365760" y="4096512"/>
+            <a:ext cx="1371600" cy="804672"/>
+          </a:xfrm>
+          <a:prstGeom prst="rect">
+            <a:avLst>
+              <a:gd name="adj" fmla="val 6818"/>
+            </a:avLst>
+          </a:prstGeom>
+          <a:solidFill>
+            <a:srgbClr val="E2E8F0"/>
+          </a:solidFill>
+          <a:ln w="12700">
+            <a:solidFill>
+              <a:srgbClr val="E2E8F0"/>
+            </a:solidFill>
+            <a:prstDash val="solid"/>
+          </a:ln>
+        </p:spPr>
+      </p:sp>
+      <p:sp>
+        <p:nvSpPr>
+          <p:cNvPr id="28" name="Text 26"/>
+          <p:cNvSpPr/>
+          <p:nvPr/>
+        </p:nvSpPr>
+        <p:spPr>
+          <a:xfrm>
+            <a:off x="365760" y="4096512"/>
+            <a:ext cx="1371600" cy="804672"/>
           </a:xfrm>
           <a:prstGeom prst="rect">
             <a:avLst/>
@@ -30632,96 +30665,30 @@
               <a:buNone/>
             </a:pPr>
             <a:r>
-              <a:rPr lang="en-US" sz="1600" b="1" dirty="0">
-                <a:solidFill>
-                  <a:srgbClr val="0D9488"/>
+              <a:rPr lang="en-US" sz="1100" b="1" dirty="0">
+                <a:solidFill>
+                  <a:srgbClr val="475569"/>
                 </a:solidFill>
                 <a:latin typeface="Trebuchet MS" pitchFamily="34" charset="0"/>
                 <a:ea typeface="Trebuchet MS" pitchFamily="34" charset="-122"/>
                 <a:cs typeface="Trebuchet MS" pitchFamily="34" charset="-120"/>
               </a:rPr>
-              <a:t>·</a:t>
-            </a:r>
-            <a:endParaRPr lang="en-US" sz="1600" dirty="0"/>
-          </a:p>
-        </p:txBody>
-      </p:sp>
-      <p:sp>
-        <p:nvSpPr>
-          <p:cNvPr id="28" name="Shape 26"/>
-          <p:cNvSpPr/>
-          <p:nvPr/>
-        </p:nvSpPr>
-        <p:spPr>
-          <a:xfrm>
-            <a:off x="5742432" y="3364992"/>
-            <a:ext cx="1645920" cy="475488"/>
-          </a:xfrm>
-          <a:prstGeom prst="rect">
-            <a:avLst>
-              <a:gd name="adj" fmla="val 9615"/>
-            </a:avLst>
-          </a:prstGeom>
-          <a:solidFill>
-            <a:srgbClr val="FFFFFF"/>
-          </a:solidFill>
-          <a:ln w="12700">
-            <a:solidFill>
-              <a:srgbClr val="0D9488"/>
-            </a:solidFill>
-            <a:prstDash val="solid"/>
-          </a:ln>
-        </p:spPr>
-      </p:sp>
-      <p:sp>
-        <p:nvSpPr>
-          <p:cNvPr id="29" name="Text 27"/>
-          <p:cNvSpPr/>
-          <p:nvPr/>
-        </p:nvSpPr>
-        <p:spPr>
-          <a:xfrm>
-            <a:off x="5742432" y="3364992"/>
-            <a:ext cx="1645920" cy="475488"/>
-          </a:xfrm>
-          <a:prstGeom prst="rect">
-            <a:avLst/>
-          </a:prstGeom>
-          <a:noFill/>
-          <a:ln/>
-        </p:spPr>
-        <p:txBody>
-          <a:bodyPr wrap="square" lIns="0" tIns="0" rIns="0" bIns="0" rtlCol="0" anchor="ctr"/>
-          <a:lstStyle/>
-          <a:p>
-            <a:pPr algn="ctr" indent="0" marL="0">
-              <a:buNone/>
-            </a:pPr>
-            <a:r>
-              <a:rPr lang="en-US" sz="1400" b="1" dirty="0">
-                <a:solidFill>
-                  <a:srgbClr val="0D9488"/>
-                </a:solidFill>
-                <a:latin typeface="Trebuchet MS" pitchFamily="34" charset="0"/>
-                <a:ea typeface="Trebuchet MS" pitchFamily="34" charset="-122"/>
-                <a:cs typeface="Trebuchet MS" pitchFamily="34" charset="-120"/>
-              </a:rPr>
-              <a:t>ed</a:t>
-            </a:r>
-            <a:endParaRPr lang="en-US" sz="1400" dirty="0"/>
-          </a:p>
-        </p:txBody>
-      </p:sp>
-      <p:sp>
-        <p:nvSpPr>
-          <p:cNvPr id="30" name="Shape 28"/>
-          <p:cNvSpPr/>
-          <p:nvPr/>
-        </p:nvSpPr>
-        <p:spPr>
-          <a:xfrm>
-            <a:off x="365760" y="4096512"/>
-            <a:ext cx="1371600" cy="804672"/>
+              <a:t>Phonemes</a:t>
+            </a:r>
+            <a:endParaRPr lang="en-US" sz="1100" dirty="0"/>
+          </a:p>
+        </p:txBody>
+      </p:sp>
+      <p:sp>
+        <p:nvSpPr>
+          <p:cNvPr id="29" name="Shape 27"/>
+          <p:cNvSpPr/>
+          <p:nvPr/>
+        </p:nvSpPr>
+        <p:spPr>
+          <a:xfrm>
+            <a:off x="1874520" y="4096512"/>
+            <a:ext cx="6903720" cy="804672"/>
           </a:xfrm>
           <a:prstGeom prst="rect">
             <a:avLst>
@@ -30729,85 +30696,19 @@
             </a:avLst>
           </a:prstGeom>
           <a:solidFill>
-            <a:srgbClr val="E2E8F0"/>
+            <a:srgbClr val="F8FAFC"/>
           </a:solidFill>
           <a:ln w="12700">
             <a:solidFill>
               <a:srgbClr val="E2E8F0"/>
             </a:solidFill>
-            <a:prstDash val="solid"/>
-          </a:ln>
-        </p:spPr>
-      </p:sp>
-      <p:sp>
-        <p:nvSpPr>
-          <p:cNvPr id="31" name="Text 29"/>
-          <p:cNvSpPr/>
-          <p:nvPr/>
-        </p:nvSpPr>
-        <p:spPr>
-          <a:xfrm>
-            <a:off x="365760" y="4096512"/>
-            <a:ext cx="1371600" cy="804672"/>
-          </a:xfrm>
-          <a:prstGeom prst="rect">
-            <a:avLst/>
-          </a:prstGeom>
-          <a:noFill/>
-          <a:ln/>
-        </p:spPr>
-        <p:txBody>
-          <a:bodyPr wrap="square" lIns="0" tIns="0" rIns="0" bIns="0" rtlCol="0" anchor="ctr"/>
-          <a:lstStyle/>
-          <a:p>
-            <a:pPr algn="ctr" indent="0" marL="0">
-              <a:buNone/>
-            </a:pPr>
-            <a:r>
-              <a:rPr lang="en-US" sz="1100" b="1" dirty="0">
-                <a:solidFill>
-                  <a:srgbClr val="475569"/>
-                </a:solidFill>
-                <a:latin typeface="Trebuchet MS" pitchFamily="34" charset="0"/>
-                <a:ea typeface="Trebuchet MS" pitchFamily="34" charset="-122"/>
-                <a:cs typeface="Trebuchet MS" pitchFamily="34" charset="-120"/>
-              </a:rPr>
-              <a:t>Phonemes</a:t>
-            </a:r>
-            <a:endParaRPr lang="en-US" sz="1100" dirty="0"/>
-          </a:p>
-        </p:txBody>
-      </p:sp>
-      <p:sp>
-        <p:nvSpPr>
-          <p:cNvPr id="32" name="Shape 30"/>
-          <p:cNvSpPr/>
-          <p:nvPr/>
-        </p:nvSpPr>
-        <p:spPr>
-          <a:xfrm>
-            <a:off x="1874520" y="4096512"/>
-            <a:ext cx="6903720" cy="804672"/>
-          </a:xfrm>
-          <a:prstGeom prst="rect">
-            <a:avLst>
-              <a:gd name="adj" fmla="val 6818"/>
-            </a:avLst>
-          </a:prstGeom>
-          <a:solidFill>
-            <a:srgbClr val="F8FAFC"/>
-          </a:solidFill>
-          <a:ln w="12700">
-            <a:solidFill>
-              <a:srgbClr val="E2E8F0"/>
-            </a:solidFill>
             <a:prstDash val="dash"/>
           </a:ln>
         </p:spPr>
       </p:sp>
       <p:sp>
         <p:nvSpPr>
-          <p:cNvPr id="33" name="Text 31"/>
+          <p:cNvPr id="30" name="Text 28"/>
           <p:cNvSpPr/>
           <p:nvPr/>
         </p:nvSpPr>
@@ -31559,7 +31460,7 @@
                 <a:ea typeface="Calibri" pitchFamily="34" charset="-122"/>
                 <a:cs typeface="Calibri" pitchFamily="34" charset="-120"/>
               </a:rPr>
-              <a:t>having a quality or describing a person</a:t>
+              <a:t>in the past</a:t>
             </a:r>
             <a:endParaRPr lang="en-US" sz="850" dirty="0"/>
           </a:p>
@@ -31666,7 +31567,7 @@
         </p:nvSpPr>
         <p:spPr>
           <a:xfrm>
-            <a:off x="2999232" y="3364992"/>
+            <a:off x="4370832" y="3364992"/>
             <a:ext cx="1645920" cy="475488"/>
           </a:xfrm>
           <a:prstGeom prst="rect">
@@ -31693,7 +31594,7 @@
         </p:nvSpPr>
         <p:spPr>
           <a:xfrm>
-            <a:off x="2999232" y="3364992"/>
+            <a:off x="4370832" y="3364992"/>
             <a:ext cx="1645920" cy="475488"/>
           </a:xfrm>
           <a:prstGeom prst="rect">
@@ -31718,7 +31619,7 @@
                 <a:ea typeface="Trebuchet MS" pitchFamily="34" charset="-122"/>
                 <a:cs typeface="Trebuchet MS" pitchFamily="34" charset="-120"/>
               </a:rPr>
-              <a:t>learn</a:t>
+              <a:t>learned</a:t>
             </a:r>
             <a:endParaRPr lang="en-US" sz="1400" dirty="0"/>
           </a:p>
@@ -31726,14 +31627,41 @@
       </p:sp>
       <p:sp>
         <p:nvSpPr>
-          <p:cNvPr id="27" name="Text 25"/>
-          <p:cNvSpPr/>
-          <p:nvPr/>
-        </p:nvSpPr>
-        <p:spPr>
-          <a:xfrm>
-            <a:off x="4645152" y="3364992"/>
-            <a:ext cx="1097280" cy="475488"/>
+          <p:cNvPr id="27" name="Shape 25"/>
+          <p:cNvSpPr/>
+          <p:nvPr/>
+        </p:nvSpPr>
+        <p:spPr>
+          <a:xfrm>
+            <a:off x="365760" y="4096512"/>
+            <a:ext cx="1371600" cy="804672"/>
+          </a:xfrm>
+          <a:prstGeom prst="rect">
+            <a:avLst>
+              <a:gd name="adj" fmla="val 6818"/>
+            </a:avLst>
+          </a:prstGeom>
+          <a:solidFill>
+            <a:srgbClr val="E2E8F0"/>
+          </a:solidFill>
+          <a:ln w="12700">
+            <a:solidFill>
+              <a:srgbClr val="E2E8F0"/>
+            </a:solidFill>
+            <a:prstDash val="solid"/>
+          </a:ln>
+        </p:spPr>
+      </p:sp>
+      <p:sp>
+        <p:nvSpPr>
+          <p:cNvPr id="28" name="Text 26"/>
+          <p:cNvSpPr/>
+          <p:nvPr/>
+        </p:nvSpPr>
+        <p:spPr>
+          <a:xfrm>
+            <a:off x="365760" y="4096512"/>
+            <a:ext cx="1371600" cy="804672"/>
           </a:xfrm>
           <a:prstGeom prst="rect">
             <a:avLst/>
@@ -31749,57 +31677,84 @@
               <a:buNone/>
             </a:pPr>
             <a:r>
-              <a:rPr lang="en-US" sz="1600" b="1" dirty="0">
-                <a:solidFill>
-                  <a:srgbClr val="0D9488"/>
+              <a:rPr lang="en-US" sz="1100" b="1" dirty="0">
+                <a:solidFill>
+                  <a:srgbClr val="475569"/>
                 </a:solidFill>
                 <a:latin typeface="Trebuchet MS" pitchFamily="34" charset="0"/>
                 <a:ea typeface="Trebuchet MS" pitchFamily="34" charset="-122"/>
                 <a:cs typeface="Trebuchet MS" pitchFamily="34" charset="-120"/>
               </a:rPr>
-              <a:t>·</a:t>
-            </a:r>
-            <a:endParaRPr lang="en-US" sz="1600" dirty="0"/>
-          </a:p>
-        </p:txBody>
-      </p:sp>
-      <p:sp>
-        <p:nvSpPr>
-          <p:cNvPr id="28" name="Shape 26"/>
-          <p:cNvSpPr/>
-          <p:nvPr/>
-        </p:nvSpPr>
-        <p:spPr>
-          <a:xfrm>
-            <a:off x="5742432" y="3364992"/>
-            <a:ext cx="1645920" cy="475488"/>
+              <a:t>Phonemes</a:t>
+            </a:r>
+            <a:endParaRPr lang="en-US" sz="1100" dirty="0"/>
+          </a:p>
+        </p:txBody>
+      </p:sp>
+      <p:sp>
+        <p:nvSpPr>
+          <p:cNvPr id="29" name="Shape 27"/>
+          <p:cNvSpPr/>
+          <p:nvPr/>
+        </p:nvSpPr>
+        <p:spPr>
+          <a:xfrm>
+            <a:off x="1874520" y="4096512"/>
+            <a:ext cx="6903720" cy="658368"/>
           </a:xfrm>
           <a:prstGeom prst="rect">
             <a:avLst>
-              <a:gd name="adj" fmla="val 9615"/>
+              <a:gd name="adj" fmla="val 8333"/>
             </a:avLst>
           </a:prstGeom>
           <a:solidFill>
+            <a:srgbClr val="FCE7F3"/>
+          </a:solidFill>
+          <a:ln w="12700">
+            <a:solidFill>
+              <a:srgbClr val="DB2777"/>
+            </a:solidFill>
+            <a:prstDash val="solid"/>
+          </a:ln>
+        </p:spPr>
+      </p:sp>
+      <p:sp>
+        <p:nvSpPr>
+          <p:cNvPr id="30" name="Shape 28"/>
+          <p:cNvSpPr/>
+          <p:nvPr/>
+        </p:nvSpPr>
+        <p:spPr>
+          <a:xfrm>
+            <a:off x="2670048" y="4169664"/>
+            <a:ext cx="685800" cy="475488"/>
+          </a:xfrm>
+          <a:prstGeom prst="rect">
+            <a:avLst>
+              <a:gd name="adj" fmla="val 7692"/>
+            </a:avLst>
+          </a:prstGeom>
+          <a:solidFill>
             <a:srgbClr val="FFFFFF"/>
           </a:solidFill>
           <a:ln w="12700">
             <a:solidFill>
-              <a:srgbClr val="0D9488"/>
-            </a:solidFill>
-            <a:prstDash val="solid"/>
-          </a:ln>
-        </p:spPr>
-      </p:sp>
-      <p:sp>
-        <p:nvSpPr>
-          <p:cNvPr id="29" name="Text 27"/>
-          <p:cNvSpPr/>
-          <p:nvPr/>
-        </p:nvSpPr>
-        <p:spPr>
-          <a:xfrm>
-            <a:off x="5742432" y="3364992"/>
-            <a:ext cx="1645920" cy="475488"/>
+              <a:srgbClr val="DB2777"/>
+            </a:solidFill>
+            <a:prstDash val="solid"/>
+          </a:ln>
+        </p:spPr>
+      </p:sp>
+      <p:sp>
+        <p:nvSpPr>
+          <p:cNvPr id="31" name="Text 29"/>
+          <p:cNvSpPr/>
+          <p:nvPr/>
+        </p:nvSpPr>
+        <p:spPr>
+          <a:xfrm>
+            <a:off x="2670048" y="4169664"/>
+            <a:ext cx="685800" cy="475488"/>
           </a:xfrm>
           <a:prstGeom prst="rect">
             <a:avLst/>
@@ -31815,57 +31770,57 @@
               <a:buNone/>
             </a:pPr>
             <a:r>
-              <a:rPr lang="en-US" sz="1400" b="1" dirty="0">
-                <a:solidFill>
-                  <a:srgbClr val="0D9488"/>
+              <a:rPr lang="en-US" sz="900" b="1" dirty="0">
+                <a:solidFill>
+                  <a:srgbClr val="9D174D"/>
                 </a:solidFill>
                 <a:latin typeface="Trebuchet MS" pitchFamily="34" charset="0"/>
                 <a:ea typeface="Trebuchet MS" pitchFamily="34" charset="-122"/>
                 <a:cs typeface="Trebuchet MS" pitchFamily="34" charset="-120"/>
               </a:rPr>
-              <a:t>ed</a:t>
-            </a:r>
-            <a:endParaRPr lang="en-US" sz="1400" dirty="0"/>
-          </a:p>
-        </p:txBody>
-      </p:sp>
-      <p:sp>
-        <p:nvSpPr>
-          <p:cNvPr id="30" name="Shape 28"/>
-          <p:cNvSpPr/>
-          <p:nvPr/>
-        </p:nvSpPr>
-        <p:spPr>
-          <a:xfrm>
-            <a:off x="365760" y="4096512"/>
-            <a:ext cx="1371600" cy="804672"/>
+              <a:t>l</a:t>
+            </a:r>
+            <a:endParaRPr lang="en-US" sz="900" dirty="0"/>
+          </a:p>
+        </p:txBody>
+      </p:sp>
+      <p:sp>
+        <p:nvSpPr>
+          <p:cNvPr id="32" name="Shape 30"/>
+          <p:cNvSpPr/>
+          <p:nvPr/>
+        </p:nvSpPr>
+        <p:spPr>
+          <a:xfrm>
+            <a:off x="4123944" y="4169664"/>
+            <a:ext cx="685800" cy="475488"/>
           </a:xfrm>
           <a:prstGeom prst="rect">
             <a:avLst>
-              <a:gd name="adj" fmla="val 6818"/>
+              <a:gd name="adj" fmla="val 7692"/>
             </a:avLst>
           </a:prstGeom>
           <a:solidFill>
-            <a:srgbClr val="E2E8F0"/>
-          </a:solidFill>
-          <a:ln w="12700">
-            <a:solidFill>
-              <a:srgbClr val="E2E8F0"/>
-            </a:solidFill>
-            <a:prstDash val="solid"/>
-          </a:ln>
-        </p:spPr>
-      </p:sp>
-      <p:sp>
-        <p:nvSpPr>
-          <p:cNvPr id="31" name="Text 29"/>
-          <p:cNvSpPr/>
-          <p:nvPr/>
-        </p:nvSpPr>
-        <p:spPr>
-          <a:xfrm>
-            <a:off x="365760" y="4096512"/>
-            <a:ext cx="1371600" cy="804672"/>
+            <a:srgbClr val="FFFFFF"/>
+          </a:solidFill>
+          <a:ln w="12700">
+            <a:solidFill>
+              <a:srgbClr val="DB2777"/>
+            </a:solidFill>
+            <a:prstDash val="solid"/>
+          </a:ln>
+        </p:spPr>
+      </p:sp>
+      <p:sp>
+        <p:nvSpPr>
+          <p:cNvPr id="33" name="Text 31"/>
+          <p:cNvSpPr/>
+          <p:nvPr/>
+        </p:nvSpPr>
+        <p:spPr>
+          <a:xfrm>
+            <a:off x="4123944" y="4169664"/>
+            <a:ext cx="685800" cy="475488"/>
           </a:xfrm>
           <a:prstGeom prst="rect">
             <a:avLst/>
@@ -31881,56 +31836,29 @@
               <a:buNone/>
             </a:pPr>
             <a:r>
-              <a:rPr lang="en-US" sz="1100" b="1" dirty="0">
-                <a:solidFill>
-                  <a:srgbClr val="475569"/>
+              <a:rPr lang="en-US" sz="900" b="1" dirty="0">
+                <a:solidFill>
+                  <a:srgbClr val="9D174D"/>
                 </a:solidFill>
                 <a:latin typeface="Trebuchet MS" pitchFamily="34" charset="0"/>
                 <a:ea typeface="Trebuchet MS" pitchFamily="34" charset="-122"/>
                 <a:cs typeface="Trebuchet MS" pitchFamily="34" charset="-120"/>
               </a:rPr>
-              <a:t>Phonemes</a:t>
-            </a:r>
-            <a:endParaRPr lang="en-US" sz="1100" dirty="0"/>
-          </a:p>
-        </p:txBody>
-      </p:sp>
-      <p:sp>
-        <p:nvSpPr>
-          <p:cNvPr id="32" name="Shape 30"/>
-          <p:cNvSpPr/>
-          <p:nvPr/>
-        </p:nvSpPr>
-        <p:spPr>
-          <a:xfrm>
-            <a:off x="1874520" y="4096512"/>
-            <a:ext cx="6903720" cy="658368"/>
-          </a:xfrm>
-          <a:prstGeom prst="rect">
-            <a:avLst>
-              <a:gd name="adj" fmla="val 8333"/>
-            </a:avLst>
-          </a:prstGeom>
-          <a:solidFill>
-            <a:srgbClr val="FCE7F3"/>
-          </a:solidFill>
-          <a:ln w="12700">
-            <a:solidFill>
-              <a:srgbClr val="DB2777"/>
-            </a:solidFill>
-            <a:prstDash val="solid"/>
-          </a:ln>
-        </p:spPr>
-      </p:sp>
-      <p:sp>
-        <p:nvSpPr>
-          <p:cNvPr id="33" name="Shape 31"/>
-          <p:cNvSpPr/>
-          <p:nvPr/>
-        </p:nvSpPr>
-        <p:spPr>
-          <a:xfrm>
-            <a:off x="2670048" y="4169664"/>
+              <a:t>ear</a:t>
+            </a:r>
+            <a:endParaRPr lang="en-US" sz="900" dirty="0"/>
+          </a:p>
+        </p:txBody>
+      </p:sp>
+      <p:sp>
+        <p:nvSpPr>
+          <p:cNvPr id="34" name="Shape 32"/>
+          <p:cNvSpPr/>
+          <p:nvPr/>
+        </p:nvSpPr>
+        <p:spPr>
+          <a:xfrm>
+            <a:off x="5577840" y="4169664"/>
             <a:ext cx="685800" cy="475488"/>
           </a:xfrm>
           <a:prstGeom prst="rect">
@@ -31951,13 +31879,13 @@
       </p:sp>
       <p:sp>
         <p:nvSpPr>
-          <p:cNvPr id="34" name="Text 32"/>
-          <p:cNvSpPr/>
-          <p:nvPr/>
-        </p:nvSpPr>
-        <p:spPr>
-          <a:xfrm>
-            <a:off x="2670048" y="4169664"/>
+          <p:cNvPr id="35" name="Text 33"/>
+          <p:cNvSpPr/>
+          <p:nvPr/>
+        </p:nvSpPr>
+        <p:spPr>
+          <a:xfrm>
+            <a:off x="5577840" y="4169664"/>
             <a:ext cx="685800" cy="475488"/>
           </a:xfrm>
           <a:prstGeom prst="rect">
@@ -31982,7 +31910,7 @@
                 <a:ea typeface="Trebuchet MS" pitchFamily="34" charset="-122"/>
                 <a:cs typeface="Trebuchet MS" pitchFamily="34" charset="-120"/>
               </a:rPr>
-              <a:t>l</a:t>
+              <a:t>n</a:t>
             </a:r>
             <a:endParaRPr lang="en-US" sz="900" dirty="0"/>
           </a:p>
@@ -31990,13 +31918,13 @@
       </p:sp>
       <p:sp>
         <p:nvSpPr>
-          <p:cNvPr id="35" name="Shape 33"/>
-          <p:cNvSpPr/>
-          <p:nvPr/>
-        </p:nvSpPr>
-        <p:spPr>
-          <a:xfrm>
-            <a:off x="4123944" y="4169664"/>
+          <p:cNvPr id="36" name="Shape 34"/>
+          <p:cNvSpPr/>
+          <p:nvPr/>
+        </p:nvSpPr>
+        <p:spPr>
+          <a:xfrm>
+            <a:off x="7031736" y="4169664"/>
             <a:ext cx="685800" cy="475488"/>
           </a:xfrm>
           <a:prstGeom prst="rect">
@@ -32017,139 +31945,7 @@
       </p:sp>
       <p:sp>
         <p:nvSpPr>
-          <p:cNvPr id="36" name="Text 34"/>
-          <p:cNvSpPr/>
-          <p:nvPr/>
-        </p:nvSpPr>
-        <p:spPr>
-          <a:xfrm>
-            <a:off x="4123944" y="4169664"/>
-            <a:ext cx="685800" cy="475488"/>
-          </a:xfrm>
-          <a:prstGeom prst="rect">
-            <a:avLst/>
-          </a:prstGeom>
-          <a:noFill/>
-          <a:ln/>
-        </p:spPr>
-        <p:txBody>
-          <a:bodyPr wrap="square" lIns="0" tIns="0" rIns="0" bIns="0" rtlCol="0" anchor="ctr"/>
-          <a:lstStyle/>
-          <a:p>
-            <a:pPr algn="ctr" indent="0" marL="0">
-              <a:buNone/>
-            </a:pPr>
-            <a:r>
-              <a:rPr lang="en-US" sz="900" b="1" dirty="0">
-                <a:solidFill>
-                  <a:srgbClr val="9D174D"/>
-                </a:solidFill>
-                <a:latin typeface="Trebuchet MS" pitchFamily="34" charset="0"/>
-                <a:ea typeface="Trebuchet MS" pitchFamily="34" charset="-122"/>
-                <a:cs typeface="Trebuchet MS" pitchFamily="34" charset="-120"/>
-              </a:rPr>
-              <a:t>ear</a:t>
-            </a:r>
-            <a:endParaRPr lang="en-US" sz="900" dirty="0"/>
-          </a:p>
-        </p:txBody>
-      </p:sp>
-      <p:sp>
-        <p:nvSpPr>
-          <p:cNvPr id="37" name="Shape 35"/>
-          <p:cNvSpPr/>
-          <p:nvPr/>
-        </p:nvSpPr>
-        <p:spPr>
-          <a:xfrm>
-            <a:off x="5577840" y="4169664"/>
-            <a:ext cx="685800" cy="475488"/>
-          </a:xfrm>
-          <a:prstGeom prst="rect">
-            <a:avLst>
-              <a:gd name="adj" fmla="val 7692"/>
-            </a:avLst>
-          </a:prstGeom>
-          <a:solidFill>
-            <a:srgbClr val="FFFFFF"/>
-          </a:solidFill>
-          <a:ln w="12700">
-            <a:solidFill>
-              <a:srgbClr val="DB2777"/>
-            </a:solidFill>
-            <a:prstDash val="solid"/>
-          </a:ln>
-        </p:spPr>
-      </p:sp>
-      <p:sp>
-        <p:nvSpPr>
-          <p:cNvPr id="38" name="Text 36"/>
-          <p:cNvSpPr/>
-          <p:nvPr/>
-        </p:nvSpPr>
-        <p:spPr>
-          <a:xfrm>
-            <a:off x="5577840" y="4169664"/>
-            <a:ext cx="685800" cy="475488"/>
-          </a:xfrm>
-          <a:prstGeom prst="rect">
-            <a:avLst/>
-          </a:prstGeom>
-          <a:noFill/>
-          <a:ln/>
-        </p:spPr>
-        <p:txBody>
-          <a:bodyPr wrap="square" lIns="0" tIns="0" rIns="0" bIns="0" rtlCol="0" anchor="ctr"/>
-          <a:lstStyle/>
-          <a:p>
-            <a:pPr algn="ctr" indent="0" marL="0">
-              <a:buNone/>
-            </a:pPr>
-            <a:r>
-              <a:rPr lang="en-US" sz="900" b="1" dirty="0">
-                <a:solidFill>
-                  <a:srgbClr val="9D174D"/>
-                </a:solidFill>
-                <a:latin typeface="Trebuchet MS" pitchFamily="34" charset="0"/>
-                <a:ea typeface="Trebuchet MS" pitchFamily="34" charset="-122"/>
-                <a:cs typeface="Trebuchet MS" pitchFamily="34" charset="-120"/>
-              </a:rPr>
-              <a:t>n</a:t>
-            </a:r>
-            <a:endParaRPr lang="en-US" sz="900" dirty="0"/>
-          </a:p>
-        </p:txBody>
-      </p:sp>
-      <p:sp>
-        <p:nvSpPr>
-          <p:cNvPr id="39" name="Shape 37"/>
-          <p:cNvSpPr/>
-          <p:nvPr/>
-        </p:nvSpPr>
-        <p:spPr>
-          <a:xfrm>
-            <a:off x="7031736" y="4169664"/>
-            <a:ext cx="685800" cy="475488"/>
-          </a:xfrm>
-          <a:prstGeom prst="rect">
-            <a:avLst>
-              <a:gd name="adj" fmla="val 7692"/>
-            </a:avLst>
-          </a:prstGeom>
-          <a:solidFill>
-            <a:srgbClr val="FFFFFF"/>
-          </a:solidFill>
-          <a:ln w="12700">
-            <a:solidFill>
-              <a:srgbClr val="DB2777"/>
-            </a:solidFill>
-            <a:prstDash val="solid"/>
-          </a:ln>
-        </p:spPr>
-      </p:sp>
-      <p:sp>
-        <p:nvSpPr>
-          <p:cNvPr id="40" name="Text 38"/>
+          <p:cNvPr id="37" name="Text 35"/>
           <p:cNvSpPr/>
           <p:nvPr/>
         </p:nvSpPr>
@@ -34287,7 +34083,7 @@
                 <a:ea typeface="Trebuchet MS" pitchFamily="34" charset="-122"/>
                 <a:cs typeface="Trebuchet MS" pitchFamily="34" charset="-120"/>
               </a:rPr>
-              <a:t>mis-</a:t>
+              <a:t>out-</a:t>
             </a:r>
             <a:endParaRPr lang="en-US" sz="1300" dirty="0"/>
           </a:p>
@@ -34440,7 +34236,7 @@
                 <a:ea typeface="Trebuchet MS" pitchFamily="34" charset="-122"/>
                 <a:cs typeface="Trebuchet MS" pitchFamily="34" charset="-120"/>
               </a:rPr>
-              <a:t>out-</a:t>
+              <a:t>self-</a:t>
             </a:r>
             <a:endParaRPr lang="en-US" sz="1300" dirty="0"/>
           </a:p>
@@ -34787,7 +34583,7 @@
                 <a:ea typeface="Trebuchet MS" pitchFamily="34" charset="-122"/>
                 <a:cs typeface="Trebuchet MS" pitchFamily="34" charset="-120"/>
               </a:rPr>
-              <a:t>learned</a:t>
+              <a:t>learner</a:t>
             </a:r>
             <a:endParaRPr lang="en-US" sz="1200" dirty="0"/>
           </a:p>
@@ -34919,7 +34715,7 @@
                 <a:ea typeface="Trebuchet MS" pitchFamily="34" charset="-122"/>
                 <a:cs typeface="Trebuchet MS" pitchFamily="34" charset="-120"/>
               </a:rPr>
-              <a:t>learner</a:t>
+              <a:t>learned</a:t>
             </a:r>
             <a:endParaRPr lang="en-US" sz="1200" dirty="0"/>
           </a:p>
@@ -34985,7 +34781,7 @@
                 <a:ea typeface="Trebuchet MS" pitchFamily="34" charset="-122"/>
                 <a:cs typeface="Trebuchet MS" pitchFamily="34" charset="-120"/>
               </a:rPr>
-              <a:t>learners</a:t>
+              <a:t>learnt</a:t>
             </a:r>
             <a:endParaRPr lang="en-US" sz="1200" dirty="0"/>
           </a:p>
@@ -35117,7 +34913,7 @@
                 <a:ea typeface="Trebuchet MS" pitchFamily="34" charset="-122"/>
                 <a:cs typeface="Trebuchet MS" pitchFamily="34" charset="-120"/>
               </a:rPr>
-              <a:t>relearned</a:t>
+              <a:t>relearning</a:t>
             </a:r>
             <a:endParaRPr lang="en-US" sz="1200" dirty="0"/>
           </a:p>
@@ -35183,7 +34979,7 @@
                 <a:ea typeface="Trebuchet MS" pitchFamily="34" charset="-122"/>
                 <a:cs typeface="Trebuchet MS" pitchFamily="34" charset="-120"/>
               </a:rPr>
-              <a:t>mislearned</a:t>
+              <a:t>learners</a:t>
             </a:r>
             <a:endParaRPr lang="en-US" sz="1200" dirty="0"/>
           </a:p>
@@ -35249,7 +35045,7 @@
                 <a:ea typeface="Trebuchet MS" pitchFamily="34" charset="-122"/>
                 <a:cs typeface="Trebuchet MS" pitchFamily="34" charset="-120"/>
               </a:rPr>
-              <a:t>learnt</a:t>
+              <a:t>self-learning</a:t>
             </a:r>
             <a:endParaRPr lang="en-US" sz="1200" dirty="0"/>
           </a:p>
@@ -36437,7 +36233,7 @@
                 <a:ea typeface="Calibri" pitchFamily="34" charset="-122"/>
                 <a:cs typeface="Calibri" pitchFamily="34" charset="-120"/>
               </a:rPr>
-              <a:t>1.  The word 'learner' contains the root 'learn' plus the suffix '-er', meaning a person who learns.</a:t>
+              <a:t>1.  The word 'learner' contains the root 'learn' plus a suffix.</a:t>
             </a:r>
             <a:endParaRPr lang="en-US" sz="1300" dirty="0"/>
           </a:p>
@@ -36576,7 +36372,7 @@
                 <a:ea typeface="Calibri" pitchFamily="34" charset="-122"/>
                 <a:cs typeface="Calibri" pitchFamily="34" charset="-120"/>
               </a:rPr>
-              <a:t>2.  The prefix 're-' in 'relearned' means 'not' or 'opposite of'.</a:t>
+              <a:t>2.  The prefix 're' in 'relearning' means 'before'.</a:t>
             </a:r>
             <a:endParaRPr lang="en-US" sz="1300" dirty="0"/>
           </a:p>
@@ -36715,7 +36511,7 @@
                 <a:ea typeface="Calibri" pitchFamily="34" charset="-122"/>
                 <a:cs typeface="Calibri" pitchFamily="34" charset="-120"/>
               </a:rPr>
-              <a:t>3.  The word 'learning' is formed by adding the suffix '-ing' to the root 'learn'.</a:t>
+              <a:t>3.  The root 'learn' comes from ancient Greek.</a:t>
             </a:r>
             <a:endParaRPr lang="en-US" sz="1300" dirty="0"/>
           </a:p>
@@ -36738,11 +36534,11 @@
             </a:avLst>
           </a:prstGeom>
           <a:solidFill>
-            <a:srgbClr val="DCFCE7"/>
-          </a:solidFill>
-          <a:ln w="12700">
-            <a:solidFill>
-              <a:srgbClr val="16A34A"/>
+            <a:srgbClr val="FEE2E2"/>
+          </a:solidFill>
+          <a:ln w="12700">
+            <a:solidFill>
+              <a:srgbClr val="DC2626"/>
             </a:solidFill>
             <a:prstDash val="solid"/>
           </a:ln>
@@ -36775,13 +36571,13 @@
             <a:r>
               <a:rPr lang="en-US" sz="1100" b="1" dirty="0">
                 <a:solidFill>
-                  <a:srgbClr val="16A34A"/>
+                  <a:srgbClr val="DC2626"/>
                 </a:solidFill>
                 <a:latin typeface="Trebuchet MS" pitchFamily="34" charset="0"/>
                 <a:ea typeface="Trebuchet MS" pitchFamily="34" charset="-122"/>
                 <a:cs typeface="Trebuchet MS" pitchFamily="34" charset="-120"/>
               </a:rPr>
-              <a:t>TRUE</a:t>
+              <a:t>FALSE</a:t>
             </a:r>
             <a:endParaRPr lang="en-US" sz="1100" dirty="0"/>
           </a:p>
@@ -36854,7 +36650,7 @@
                 <a:ea typeface="Calibri" pitchFamily="34" charset="-122"/>
                 <a:cs typeface="Calibri" pitchFamily="34" charset="-120"/>
               </a:rPr>
-              <a:t>4.  Adding the prefix 'un-' to 'learned' creates a word meaning not yet learned or without learning.</a:t>
+              <a:t>4.  'Unlearned' means something has not been taught or studied.</a:t>
             </a:r>
             <a:endParaRPr lang="en-US" sz="1300" dirty="0"/>
           </a:p>
@@ -36993,7 +36789,7 @@
                 <a:ea typeface="Calibri" pitchFamily="34" charset="-122"/>
                 <a:cs typeface="Calibri" pitchFamily="34" charset="-120"/>
               </a:rPr>
-              <a:t>5.  The root 'learn' comes from ancient Greek.</a:t>
+              <a:t>5.  Adding '-ing' to 'learn' makes the word 'learning'.</a:t>
             </a:r>
             <a:endParaRPr lang="en-US" sz="1300" dirty="0"/>
           </a:p>
@@ -37016,11 +36812,11 @@
             </a:avLst>
           </a:prstGeom>
           <a:solidFill>
-            <a:srgbClr val="FEE2E2"/>
-          </a:solidFill>
-          <a:ln w="12700">
-            <a:solidFill>
-              <a:srgbClr val="DC2626"/>
+            <a:srgbClr val="DCFCE7"/>
+          </a:solidFill>
+          <a:ln w="12700">
+            <a:solidFill>
+              <a:srgbClr val="16A34A"/>
             </a:solidFill>
             <a:prstDash val="solid"/>
           </a:ln>
@@ -37053,13 +36849,13 @@
             <a:r>
               <a:rPr lang="en-US" sz="1100" b="1" dirty="0">
                 <a:solidFill>
-                  <a:srgbClr val="DC2626"/>
+                  <a:srgbClr val="16A34A"/>
                 </a:solidFill>
                 <a:latin typeface="Trebuchet MS" pitchFamily="34" charset="0"/>
                 <a:ea typeface="Trebuchet MS" pitchFamily="34" charset="-122"/>
                 <a:cs typeface="Trebuchet MS" pitchFamily="34" charset="-120"/>
               </a:rPr>
-              <a:t>FALSE</a:t>
+              <a:t>TRUE</a:t>
             </a:r>
             <a:endParaRPr lang="en-US" sz="1100" dirty="0"/>
           </a:p>
@@ -37527,7 +37323,7 @@
                 <a:ea typeface="Calibri" pitchFamily="34" charset="-122"/>
                 <a:cs typeface="Calibri" pitchFamily="34" charset="-120"/>
               </a:rPr>
-              <a:t>Origin: Old English: leornian</a:t>
+              <a:t>Origin: Latin: lira (furrow, track)</a:t>
             </a:r>
             <a:endParaRPr lang="en-US" sz="1100" dirty="0"/>
           </a:p>
@@ -37632,7 +37428,7 @@
                 <a:ea typeface="Trebuchet MS" pitchFamily="34" charset="-122"/>
                 <a:cs typeface="Trebuchet MS" pitchFamily="34" charset="-120"/>
               </a:rPr>
-              <a:t>learned</a:t>
+              <a:t>learner</a:t>
             </a:r>
             <a:endParaRPr lang="en-US" sz="1300" dirty="0"/>
           </a:p>
@@ -37764,7 +37560,7 @@
                 <a:ea typeface="Trebuchet MS" pitchFamily="34" charset="-122"/>
                 <a:cs typeface="Trebuchet MS" pitchFamily="34" charset="-120"/>
               </a:rPr>
-              <a:t>learner</a:t>
+              <a:t>learned</a:t>
             </a:r>
             <a:endParaRPr lang="en-US" sz="1300" dirty="0"/>
           </a:p>
@@ -37830,7 +37626,7 @@
                 <a:ea typeface="Trebuchet MS" pitchFamily="34" charset="-122"/>
                 <a:cs typeface="Trebuchet MS" pitchFamily="34" charset="-120"/>
               </a:rPr>
-              <a:t>learners</a:t>
+              <a:t>learnt</a:t>
             </a:r>
             <a:endParaRPr lang="en-US" sz="1300" dirty="0"/>
           </a:p>
@@ -37962,7 +37758,7 @@
                 <a:ea typeface="Trebuchet MS" pitchFamily="34" charset="-122"/>
                 <a:cs typeface="Trebuchet MS" pitchFamily="34" charset="-120"/>
               </a:rPr>
-              <a:t>relearned</a:t>
+              <a:t>relearning</a:t>
             </a:r>
             <a:endParaRPr lang="en-US" sz="1300" dirty="0"/>
           </a:p>
@@ -38028,7 +37824,7 @@
                 <a:ea typeface="Trebuchet MS" pitchFamily="34" charset="-122"/>
                 <a:cs typeface="Trebuchet MS" pitchFamily="34" charset="-120"/>
               </a:rPr>
-              <a:t>mislearned</a:t>
+              <a:t>learners</a:t>
             </a:r>
             <a:endParaRPr lang="en-US" sz="1300" dirty="0"/>
           </a:p>
@@ -38966,7 +38762,7 @@
                 <a:ea typeface="Trebuchet MS" pitchFamily="34" charset="-122"/>
                 <a:cs typeface="Trebuchet MS" pitchFamily="34" charset="-120"/>
               </a:rPr>
-              <a:t>mis-</a:t>
+              <a:t>out-</a:t>
             </a:r>
             <a:endParaRPr lang="en-US" sz="1300" dirty="0"/>
           </a:p>
@@ -39119,7 +38915,7 @@
                 <a:ea typeface="Trebuchet MS" pitchFamily="34" charset="-122"/>
                 <a:cs typeface="Trebuchet MS" pitchFamily="34" charset="-120"/>
               </a:rPr>
-              <a:t>out-</a:t>
+              <a:t>self-</a:t>
             </a:r>
             <a:endParaRPr lang="en-US" sz="1300" dirty="0"/>
           </a:p>
@@ -39802,7 +39598,7 @@
                 <a:ea typeface="Trebuchet MS" pitchFamily="34" charset="-122"/>
                 <a:cs typeface="Trebuchet MS" pitchFamily="34" charset="-120"/>
               </a:rPr>
-              <a:t>learned</a:t>
+              <a:t>learner</a:t>
             </a:r>
             <a:endParaRPr lang="en-US" sz="1400" dirty="0"/>
           </a:p>
@@ -40206,7 +40002,7 @@
                 <a:ea typeface="Trebuchet MS" pitchFamily="34" charset="-122"/>
                 <a:cs typeface="Trebuchet MS" pitchFamily="34" charset="-120"/>
               </a:rPr>
-              <a:t>learned</a:t>
+              <a:t>learner</a:t>
             </a:r>
             <a:endParaRPr lang="en-US" sz="1200" dirty="0"/>
           </a:p>
@@ -40272,7 +40068,7 @@
                 <a:ea typeface="Calibri" pitchFamily="34" charset="-122"/>
                 <a:cs typeface="Calibri" pitchFamily="34" charset="-120"/>
               </a:rPr>
-              <a:t>Having gained a lot of knowledge through study or experience.</a:t>
+              <a:t>A person who is gaining new knowledge or skills.</a:t>
             </a:r>
             <a:endParaRPr lang="en-US" sz="1200" dirty="0"/>
           </a:p>
@@ -40411,7 +40207,7 @@
                 <a:ea typeface="Calibri" pitchFamily="34" charset="-122"/>
                 <a:cs typeface="Calibri" pitchFamily="34" charset="-120"/>
               </a:rPr>
-              <a:t>Having learned something incorrectly or in the wrong way.</a:t>
+              <a:t>A group of people who are all gaining new knowledge or skills.</a:t>
             </a:r>
             <a:endParaRPr lang="en-US" sz="1200" dirty="0"/>
           </a:p>
@@ -40484,7 +40280,7 @@
                 <a:ea typeface="Trebuchet MS" pitchFamily="34" charset="-122"/>
                 <a:cs typeface="Trebuchet MS" pitchFamily="34" charset="-120"/>
               </a:rPr>
-              <a:t>learner</a:t>
+              <a:t>learned</a:t>
             </a:r>
             <a:endParaRPr lang="en-US" sz="1200" dirty="0"/>
           </a:p>
@@ -40550,7 +40346,7 @@
                 <a:ea typeface="Calibri" pitchFamily="34" charset="-122"/>
                 <a:cs typeface="Calibri" pitchFamily="34" charset="-120"/>
               </a:rPr>
-              <a:t>A person who is gaining new knowledge or skills.</a:t>
+              <a:t>Having gained a lot of knowledge through study.</a:t>
             </a:r>
             <a:endParaRPr lang="en-US" sz="1200" dirty="0"/>
           </a:p>
@@ -40623,7 +40419,7 @@
                 <a:ea typeface="Trebuchet MS" pitchFamily="34" charset="-122"/>
                 <a:cs typeface="Trebuchet MS" pitchFamily="34" charset="-120"/>
               </a:rPr>
-              <a:t>learners</a:t>
+              <a:t>learnt</a:t>
             </a:r>
             <a:endParaRPr lang="en-US" sz="1200" dirty="0"/>
           </a:p>
@@ -40689,7 +40485,7 @@
                 <a:ea typeface="Calibri" pitchFamily="34" charset="-122"/>
                 <a:cs typeface="Calibri" pitchFamily="34" charset="-120"/>
               </a:rPr>
-              <a:t>Not yet learned, or describing someone who has not gained much knowledge.</a:t>
+              <a:t>Not yet taught or not having gained knowledge about something.</a:t>
             </a:r>
             <a:endParaRPr lang="en-US" sz="1200" dirty="0"/>
           </a:p>
@@ -40828,7 +40624,7 @@
                 <a:ea typeface="Calibri" pitchFamily="34" charset="-122"/>
                 <a:cs typeface="Calibri" pitchFamily="34" charset="-120"/>
               </a:rPr>
-              <a:t>More than one person who is gaining new knowledge or skills.</a:t>
+              <a:t>Another way of saying you have already gained knowledge about something.</a:t>
             </a:r>
             <a:endParaRPr lang="en-US" sz="1200" dirty="0"/>
           </a:p>
@@ -40901,7 +40697,7 @@
                 <a:ea typeface="Trebuchet MS" pitchFamily="34" charset="-122"/>
                 <a:cs typeface="Trebuchet MS" pitchFamily="34" charset="-120"/>
               </a:rPr>
-              <a:t>relearned</a:t>
+              <a:t>relearning</a:t>
             </a:r>
             <a:endParaRPr lang="en-US" sz="1200" dirty="0"/>
           </a:p>
@@ -40967,7 +40763,7 @@
                 <a:ea typeface="Calibri" pitchFamily="34" charset="-122"/>
                 <a:cs typeface="Calibri" pitchFamily="34" charset="-120"/>
               </a:rPr>
-              <a:t>Having learned something again after forgetting it.</a:t>
+              <a:t>Going back to study and gain knowledge about something again.</a:t>
             </a:r>
             <a:endParaRPr lang="en-US" sz="1200" dirty="0"/>
           </a:p>
@@ -41040,7 +40836,7 @@
                 <a:ea typeface="Trebuchet MS" pitchFamily="34" charset="-122"/>
                 <a:cs typeface="Trebuchet MS" pitchFamily="34" charset="-120"/>
               </a:rPr>
-              <a:t>mislearned</a:t>
+              <a:t>learners</a:t>
             </a:r>
             <a:endParaRPr lang="en-US" sz="1200" dirty="0"/>
           </a:p>
@@ -41601,7 +41397,7 @@
                 <a:ea typeface="Calibri" pitchFamily="34" charset="-122"/>
                 <a:cs typeface="Calibri" pitchFamily="34" charset="-120"/>
               </a:rPr>
-              <a:t>The learner practised her spelling every morning before school.</a:t>
+              <a:t>Our class is relearning the times tables because we need more practice.</a:t>
             </a:r>
             <a:endParaRPr lang="en-US" sz="1500" dirty="0"/>
           </a:p>
@@ -41765,7 +41561,7 @@
                 <a:ea typeface="Calibri" pitchFamily="34" charset="-122"/>
                 <a:cs typeface="Calibri" pitchFamily="34" charset="-120"/>
               </a:rPr>
-              <a:t>We relearned the multiplication tables after the school holidays to refresh our memory.</a:t>
+              <a:t>Every learner in the school worked hard during the science project.</a:t>
             </a:r>
             <a:endParaRPr lang="en-US" sz="1500" dirty="0"/>
           </a:p>
@@ -41929,7 +41725,7 @@
                 <a:ea typeface="Calibri" pitchFamily="34" charset="-122"/>
                 <a:cs typeface="Calibri" pitchFamily="34" charset="-120"/>
               </a:rPr>
-              <a:t>Learning new things every day helps your brain grow stronger and smarter.</a:t>
+              <a:t>She found self-learning a new song on the guitar really exciting.</a:t>
             </a:r>
             <a:endParaRPr lang="en-US" sz="1500" dirty="0"/>
           </a:p>

--- a/output/wordlabs-learn-3day.pptx
+++ b/output/wordlabs-learn-3day.pptx
@@ -25750,7 +25750,7 @@
                 <a:ea typeface="Trebuchet MS" pitchFamily="34" charset="-122"/>
                 <a:cs typeface="Trebuchet MS" pitchFamily="34" charset="-120"/>
               </a:rPr>
-              <a:t>self</a:t>
+              <a:t>self-</a:t>
             </a:r>
             <a:endParaRPr lang="en-US" sz="1400" dirty="0"/>
           </a:p>
@@ -27084,7 +27084,7 @@
                 <a:ea typeface="Trebuchet MS" pitchFamily="34" charset="-122"/>
                 <a:cs typeface="Trebuchet MS" pitchFamily="34" charset="-120"/>
               </a:rPr>
-              <a:t>self</a:t>
+              <a:t>self-</a:t>
             </a:r>
             <a:endParaRPr lang="en-US" sz="1400" dirty="0"/>
           </a:p>
@@ -27401,8 +27401,8 @@
         </p:nvSpPr>
         <p:spPr>
           <a:xfrm>
-            <a:off x="2023872" y="4169664"/>
-            <a:ext cx="685800" cy="475488"/>
+            <a:off x="1951828" y="4169664"/>
+            <a:ext cx="603504" cy="475488"/>
           </a:xfrm>
           <a:prstGeom prst="rect">
             <a:avLst>
@@ -27428,8 +27428,8 @@
         </p:nvSpPr>
         <p:spPr>
           <a:xfrm>
-            <a:off x="2023872" y="4169664"/>
-            <a:ext cx="685800" cy="475488"/>
+            <a:off x="1951828" y="4169664"/>
+            <a:ext cx="603504" cy="475488"/>
           </a:xfrm>
           <a:prstGeom prst="rect">
             <a:avLst/>
@@ -27467,8 +27467,8 @@
         </p:nvSpPr>
         <p:spPr>
           <a:xfrm>
-            <a:off x="2831592" y="4169664"/>
-            <a:ext cx="685800" cy="475488"/>
+            <a:off x="2605209" y="4169664"/>
+            <a:ext cx="603504" cy="475488"/>
           </a:xfrm>
           <a:prstGeom prst="rect">
             <a:avLst>
@@ -27494,8 +27494,8 @@
         </p:nvSpPr>
         <p:spPr>
           <a:xfrm>
-            <a:off x="2831592" y="4169664"/>
-            <a:ext cx="685800" cy="475488"/>
+            <a:off x="2605209" y="4169664"/>
+            <a:ext cx="603504" cy="475488"/>
           </a:xfrm>
           <a:prstGeom prst="rect">
             <a:avLst/>
@@ -27533,8 +27533,8 @@
         </p:nvSpPr>
         <p:spPr>
           <a:xfrm>
-            <a:off x="3639312" y="4169664"/>
-            <a:ext cx="685800" cy="475488"/>
+            <a:off x="3258589" y="4169664"/>
+            <a:ext cx="603504" cy="475488"/>
           </a:xfrm>
           <a:prstGeom prst="rect">
             <a:avLst>
@@ -27560,8 +27560,8 @@
         </p:nvSpPr>
         <p:spPr>
           <a:xfrm>
-            <a:off x="3639312" y="4169664"/>
-            <a:ext cx="685800" cy="475488"/>
+            <a:off x="3258589" y="4169664"/>
+            <a:ext cx="603504" cy="475488"/>
           </a:xfrm>
           <a:prstGeom prst="rect">
             <a:avLst/>
@@ -27599,8 +27599,8 @@
         </p:nvSpPr>
         <p:spPr>
           <a:xfrm>
-            <a:off x="4447032" y="4169664"/>
-            <a:ext cx="685800" cy="475488"/>
+            <a:off x="3911969" y="4169664"/>
+            <a:ext cx="603504" cy="475488"/>
           </a:xfrm>
           <a:prstGeom prst="rect">
             <a:avLst>
@@ -27626,8 +27626,8 @@
         </p:nvSpPr>
         <p:spPr>
           <a:xfrm>
-            <a:off x="4447032" y="4169664"/>
-            <a:ext cx="685800" cy="475488"/>
+            <a:off x="3911969" y="4169664"/>
+            <a:ext cx="603504" cy="475488"/>
           </a:xfrm>
           <a:prstGeom prst="rect">
             <a:avLst/>
@@ -27665,8 +27665,8 @@
         </p:nvSpPr>
         <p:spPr>
           <a:xfrm>
-            <a:off x="5254752" y="4169664"/>
-            <a:ext cx="685800" cy="475488"/>
+            <a:off x="4565350" y="4169664"/>
+            <a:ext cx="603504" cy="475488"/>
           </a:xfrm>
           <a:prstGeom prst="rect">
             <a:avLst>
@@ -27692,8 +27692,8 @@
         </p:nvSpPr>
         <p:spPr>
           <a:xfrm>
-            <a:off x="5254752" y="4169664"/>
-            <a:ext cx="685800" cy="475488"/>
+            <a:off x="4565350" y="4169664"/>
+            <a:ext cx="603504" cy="475488"/>
           </a:xfrm>
           <a:prstGeom prst="rect">
             <a:avLst/>
@@ -27717,7 +27717,7 @@
                 <a:ea typeface="Trebuchet MS" pitchFamily="34" charset="-122"/>
                 <a:cs typeface="Trebuchet MS" pitchFamily="34" charset="-120"/>
               </a:rPr>
-              <a:t>l</a:t>
+              <a:t>-</a:t>
             </a:r>
             <a:endParaRPr lang="en-US" sz="900" dirty="0"/>
           </a:p>
@@ -27731,8 +27731,8 @@
         </p:nvSpPr>
         <p:spPr>
           <a:xfrm>
-            <a:off x="6062472" y="4169664"/>
-            <a:ext cx="685800" cy="475488"/>
+            <a:off x="5218730" y="4169664"/>
+            <a:ext cx="603504" cy="475488"/>
           </a:xfrm>
           <a:prstGeom prst="rect">
             <a:avLst>
@@ -27758,8 +27758,8 @@
         </p:nvSpPr>
         <p:spPr>
           <a:xfrm>
-            <a:off x="6062472" y="4169664"/>
-            <a:ext cx="685800" cy="475488"/>
+            <a:off x="5218730" y="4169664"/>
+            <a:ext cx="603504" cy="475488"/>
           </a:xfrm>
           <a:prstGeom prst="rect">
             <a:avLst/>
@@ -27783,7 +27783,7 @@
                 <a:ea typeface="Trebuchet MS" pitchFamily="34" charset="-122"/>
                 <a:cs typeface="Trebuchet MS" pitchFamily="34" charset="-120"/>
               </a:rPr>
-              <a:t>ear</a:t>
+              <a:t>l</a:t>
             </a:r>
             <a:endParaRPr lang="en-US" sz="900" dirty="0"/>
           </a:p>
@@ -27797,8 +27797,8 @@
         </p:nvSpPr>
         <p:spPr>
           <a:xfrm>
-            <a:off x="6870192" y="4169664"/>
-            <a:ext cx="685800" cy="475488"/>
+            <a:off x="5872111" y="4169664"/>
+            <a:ext cx="603504" cy="475488"/>
           </a:xfrm>
           <a:prstGeom prst="rect">
             <a:avLst>
@@ -27824,8 +27824,8 @@
         </p:nvSpPr>
         <p:spPr>
           <a:xfrm>
-            <a:off x="6870192" y="4169664"/>
-            <a:ext cx="685800" cy="475488"/>
+            <a:off x="5872111" y="4169664"/>
+            <a:ext cx="603504" cy="475488"/>
           </a:xfrm>
           <a:prstGeom prst="rect">
             <a:avLst/>
@@ -27849,7 +27849,7 @@
                 <a:ea typeface="Trebuchet MS" pitchFamily="34" charset="-122"/>
                 <a:cs typeface="Trebuchet MS" pitchFamily="34" charset="-120"/>
               </a:rPr>
-              <a:t>n</a:t>
+              <a:t>ear</a:t>
             </a:r>
             <a:endParaRPr lang="en-US" sz="900" dirty="0"/>
           </a:p>
@@ -27863,8 +27863,8 @@
         </p:nvSpPr>
         <p:spPr>
           <a:xfrm>
-            <a:off x="7677912" y="4169664"/>
-            <a:ext cx="685800" cy="475488"/>
+            <a:off x="6525491" y="4169664"/>
+            <a:ext cx="603504" cy="475488"/>
           </a:xfrm>
           <a:prstGeom prst="rect">
             <a:avLst>
@@ -27890,8 +27890,8 @@
         </p:nvSpPr>
         <p:spPr>
           <a:xfrm>
-            <a:off x="7677912" y="4169664"/>
-            <a:ext cx="685800" cy="475488"/>
+            <a:off x="6525491" y="4169664"/>
+            <a:ext cx="603504" cy="475488"/>
           </a:xfrm>
           <a:prstGeom prst="rect">
             <a:avLst/>
@@ -27915,7 +27915,139 @@
                 <a:ea typeface="Trebuchet MS" pitchFamily="34" charset="-122"/>
                 <a:cs typeface="Trebuchet MS" pitchFamily="34" charset="-120"/>
               </a:rPr>
-              <a:t>ing</a:t>
+              <a:t>n</a:t>
+            </a:r>
+            <a:endParaRPr lang="en-US" sz="900" dirty="0"/>
+          </a:p>
+        </p:txBody>
+      </p:sp>
+      <p:sp>
+        <p:nvSpPr>
+          <p:cNvPr id="55" name="Shape 53"/>
+          <p:cNvSpPr/>
+          <p:nvPr/>
+        </p:nvSpPr>
+        <p:spPr>
+          <a:xfrm>
+            <a:off x="7178871" y="4169664"/>
+            <a:ext cx="603504" cy="475488"/>
+          </a:xfrm>
+          <a:prstGeom prst="rect">
+            <a:avLst>
+              <a:gd name="adj" fmla="val 7692"/>
+            </a:avLst>
+          </a:prstGeom>
+          <a:solidFill>
+            <a:srgbClr val="FFFFFF"/>
+          </a:solidFill>
+          <a:ln w="12700">
+            <a:solidFill>
+              <a:srgbClr val="DB2777"/>
+            </a:solidFill>
+            <a:prstDash val="solid"/>
+          </a:ln>
+        </p:spPr>
+      </p:sp>
+      <p:sp>
+        <p:nvSpPr>
+          <p:cNvPr id="56" name="Text 54"/>
+          <p:cNvSpPr/>
+          <p:nvPr/>
+        </p:nvSpPr>
+        <p:spPr>
+          <a:xfrm>
+            <a:off x="7178871" y="4169664"/>
+            <a:ext cx="603504" cy="475488"/>
+          </a:xfrm>
+          <a:prstGeom prst="rect">
+            <a:avLst/>
+          </a:prstGeom>
+          <a:noFill/>
+          <a:ln/>
+        </p:spPr>
+        <p:txBody>
+          <a:bodyPr wrap="square" lIns="0" tIns="0" rIns="0" bIns="0" rtlCol="0" anchor="ctr"/>
+          <a:lstStyle/>
+          <a:p>
+            <a:pPr algn="ctr" indent="0" marL="0">
+              <a:buNone/>
+            </a:pPr>
+            <a:r>
+              <a:rPr lang="en-US" sz="900" b="1" dirty="0">
+                <a:solidFill>
+                  <a:srgbClr val="9D174D"/>
+                </a:solidFill>
+                <a:latin typeface="Trebuchet MS" pitchFamily="34" charset="0"/>
+                <a:ea typeface="Trebuchet MS" pitchFamily="34" charset="-122"/>
+                <a:cs typeface="Trebuchet MS" pitchFamily="34" charset="-120"/>
+              </a:rPr>
+              <a:t>i</a:t>
+            </a:r>
+            <a:endParaRPr lang="en-US" sz="900" dirty="0"/>
+          </a:p>
+        </p:txBody>
+      </p:sp>
+      <p:sp>
+        <p:nvSpPr>
+          <p:cNvPr id="57" name="Shape 55"/>
+          <p:cNvSpPr/>
+          <p:nvPr/>
+        </p:nvSpPr>
+        <p:spPr>
+          <a:xfrm>
+            <a:off x="7832252" y="4169664"/>
+            <a:ext cx="603504" cy="475488"/>
+          </a:xfrm>
+          <a:prstGeom prst="rect">
+            <a:avLst>
+              <a:gd name="adj" fmla="val 7692"/>
+            </a:avLst>
+          </a:prstGeom>
+          <a:solidFill>
+            <a:srgbClr val="FFFFFF"/>
+          </a:solidFill>
+          <a:ln w="12700">
+            <a:solidFill>
+              <a:srgbClr val="DB2777"/>
+            </a:solidFill>
+            <a:prstDash val="solid"/>
+          </a:ln>
+        </p:spPr>
+      </p:sp>
+      <p:sp>
+        <p:nvSpPr>
+          <p:cNvPr id="58" name="Text 56"/>
+          <p:cNvSpPr/>
+          <p:nvPr/>
+        </p:nvSpPr>
+        <p:spPr>
+          <a:xfrm>
+            <a:off x="7832252" y="4169664"/>
+            <a:ext cx="603504" cy="475488"/>
+          </a:xfrm>
+          <a:prstGeom prst="rect">
+            <a:avLst/>
+          </a:prstGeom>
+          <a:noFill/>
+          <a:ln/>
+        </p:spPr>
+        <p:txBody>
+          <a:bodyPr wrap="square" lIns="0" tIns="0" rIns="0" bIns="0" rtlCol="0" anchor="ctr"/>
+          <a:lstStyle/>
+          <a:p>
+            <a:pPr algn="ctr" indent="0" marL="0">
+              <a:buNone/>
+            </a:pPr>
+            <a:r>
+              <a:rPr lang="en-US" sz="900" b="1" dirty="0">
+                <a:solidFill>
+                  <a:srgbClr val="9D174D"/>
+                </a:solidFill>
+                <a:latin typeface="Trebuchet MS" pitchFamily="34" charset="0"/>
+                <a:ea typeface="Trebuchet MS" pitchFamily="34" charset="-122"/>
+                <a:cs typeface="Trebuchet MS" pitchFamily="34" charset="-120"/>
+              </a:rPr>
+              <a:t>ng</a:t>
             </a:r>
             <a:endParaRPr lang="en-US" sz="900" dirty="0"/>
           </a:p>
@@ -36233,7 +36365,7 @@
                 <a:ea typeface="Calibri" pitchFamily="34" charset="-122"/>
                 <a:cs typeface="Calibri" pitchFamily="34" charset="-120"/>
               </a:rPr>
-              <a:t>1.  The word 'learner' contains the root 'learn' plus a suffix.</a:t>
+              <a:t>1.  The root 'learn' comes from ancient Greek.</a:t>
             </a:r>
             <a:endParaRPr lang="en-US" sz="1300" dirty="0"/>
           </a:p>
@@ -36256,11 +36388,11 @@
             </a:avLst>
           </a:prstGeom>
           <a:solidFill>
-            <a:srgbClr val="DCFCE7"/>
-          </a:solidFill>
-          <a:ln w="12700">
-            <a:solidFill>
-              <a:srgbClr val="16A34A"/>
+            <a:srgbClr val="FEE2E2"/>
+          </a:solidFill>
+          <a:ln w="12700">
+            <a:solidFill>
+              <a:srgbClr val="DC2626"/>
             </a:solidFill>
             <a:prstDash val="solid"/>
           </a:ln>
@@ -36293,13 +36425,13 @@
             <a:r>
               <a:rPr lang="en-US" sz="1100" b="1" dirty="0">
                 <a:solidFill>
-                  <a:srgbClr val="16A34A"/>
+                  <a:srgbClr val="DC2626"/>
                 </a:solidFill>
                 <a:latin typeface="Trebuchet MS" pitchFamily="34" charset="0"/>
                 <a:ea typeface="Trebuchet MS" pitchFamily="34" charset="-122"/>
                 <a:cs typeface="Trebuchet MS" pitchFamily="34" charset="-120"/>
               </a:rPr>
-              <a:t>TRUE</a:t>
+              <a:t>FALSE</a:t>
             </a:r>
             <a:endParaRPr lang="en-US" sz="1100" dirty="0"/>
           </a:p>
@@ -36372,7 +36504,7 @@
                 <a:ea typeface="Calibri" pitchFamily="34" charset="-122"/>
                 <a:cs typeface="Calibri" pitchFamily="34" charset="-120"/>
               </a:rPr>
-              <a:t>2.  The prefix 're' in 'relearning' means 'before'.</a:t>
+              <a:t>2.  The word 'learner' contains the root 'learn' plus a suffix.</a:t>
             </a:r>
             <a:endParaRPr lang="en-US" sz="1300" dirty="0"/>
           </a:p>
@@ -36395,11 +36527,11 @@
             </a:avLst>
           </a:prstGeom>
           <a:solidFill>
-            <a:srgbClr val="FEE2E2"/>
-          </a:solidFill>
-          <a:ln w="12700">
-            <a:solidFill>
-              <a:srgbClr val="DC2626"/>
+            <a:srgbClr val="DCFCE7"/>
+          </a:solidFill>
+          <a:ln w="12700">
+            <a:solidFill>
+              <a:srgbClr val="16A34A"/>
             </a:solidFill>
             <a:prstDash val="solid"/>
           </a:ln>
@@ -36432,13 +36564,13 @@
             <a:r>
               <a:rPr lang="en-US" sz="1100" b="1" dirty="0">
                 <a:solidFill>
-                  <a:srgbClr val="DC2626"/>
+                  <a:srgbClr val="16A34A"/>
                 </a:solidFill>
                 <a:latin typeface="Trebuchet MS" pitchFamily="34" charset="0"/>
                 <a:ea typeface="Trebuchet MS" pitchFamily="34" charset="-122"/>
                 <a:cs typeface="Trebuchet MS" pitchFamily="34" charset="-120"/>
               </a:rPr>
-              <a:t>FALSE</a:t>
+              <a:t>TRUE</a:t>
             </a:r>
             <a:endParaRPr lang="en-US" sz="1100" dirty="0"/>
           </a:p>
@@ -36511,7 +36643,7 @@
                 <a:ea typeface="Calibri" pitchFamily="34" charset="-122"/>
                 <a:cs typeface="Calibri" pitchFamily="34" charset="-120"/>
               </a:rPr>
-              <a:t>3.  The root 'learn' comes from ancient Greek.</a:t>
+              <a:t>3.  'Unlearned' means something has not been taught or studied.</a:t>
             </a:r>
             <a:endParaRPr lang="en-US" sz="1300" dirty="0"/>
           </a:p>
@@ -36534,11 +36666,11 @@
             </a:avLst>
           </a:prstGeom>
           <a:solidFill>
-            <a:srgbClr val="FEE2E2"/>
-          </a:solidFill>
-          <a:ln w="12700">
-            <a:solidFill>
-              <a:srgbClr val="DC2626"/>
+            <a:srgbClr val="DCFCE7"/>
+          </a:solidFill>
+          <a:ln w="12700">
+            <a:solidFill>
+              <a:srgbClr val="16A34A"/>
             </a:solidFill>
             <a:prstDash val="solid"/>
           </a:ln>
@@ -36571,13 +36703,13 @@
             <a:r>
               <a:rPr lang="en-US" sz="1100" b="1" dirty="0">
                 <a:solidFill>
-                  <a:srgbClr val="DC2626"/>
+                  <a:srgbClr val="16A34A"/>
                 </a:solidFill>
                 <a:latin typeface="Trebuchet MS" pitchFamily="34" charset="0"/>
                 <a:ea typeface="Trebuchet MS" pitchFamily="34" charset="-122"/>
                 <a:cs typeface="Trebuchet MS" pitchFamily="34" charset="-120"/>
               </a:rPr>
-              <a:t>FALSE</a:t>
+              <a:t>TRUE</a:t>
             </a:r>
             <a:endParaRPr lang="en-US" sz="1100" dirty="0"/>
           </a:p>
@@ -36650,7 +36782,7 @@
                 <a:ea typeface="Calibri" pitchFamily="34" charset="-122"/>
                 <a:cs typeface="Calibri" pitchFamily="34" charset="-120"/>
               </a:rPr>
-              <a:t>4.  'Unlearned' means something has not been taught or studied.</a:t>
+              <a:t>4.  Adding '-ing' to 'learn' makes the word 'learning'.</a:t>
             </a:r>
             <a:endParaRPr lang="en-US" sz="1300" dirty="0"/>
           </a:p>
@@ -36789,7 +36921,7 @@
                 <a:ea typeface="Calibri" pitchFamily="34" charset="-122"/>
                 <a:cs typeface="Calibri" pitchFamily="34" charset="-120"/>
               </a:rPr>
-              <a:t>5.  Adding '-ing' to 'learn' makes the word 'learning'.</a:t>
+              <a:t>5.  The prefix 're' in 'relearning' means 'before'.</a:t>
             </a:r>
             <a:endParaRPr lang="en-US" sz="1300" dirty="0"/>
           </a:p>
@@ -36812,11 +36944,11 @@
             </a:avLst>
           </a:prstGeom>
           <a:solidFill>
-            <a:srgbClr val="DCFCE7"/>
-          </a:solidFill>
-          <a:ln w="12700">
-            <a:solidFill>
-              <a:srgbClr val="16A34A"/>
+            <a:srgbClr val="FEE2E2"/>
+          </a:solidFill>
+          <a:ln w="12700">
+            <a:solidFill>
+              <a:srgbClr val="DC2626"/>
             </a:solidFill>
             <a:prstDash val="solid"/>
           </a:ln>
@@ -36849,13 +36981,13 @@
             <a:r>
               <a:rPr lang="en-US" sz="1100" b="1" dirty="0">
                 <a:solidFill>
-                  <a:srgbClr val="16A34A"/>
+                  <a:srgbClr val="DC2626"/>
                 </a:solidFill>
                 <a:latin typeface="Trebuchet MS" pitchFamily="34" charset="0"/>
                 <a:ea typeface="Trebuchet MS" pitchFamily="34" charset="-122"/>
                 <a:cs typeface="Trebuchet MS" pitchFamily="34" charset="-120"/>
               </a:rPr>
-              <a:t>TRUE</a:t>
+              <a:t>FALSE</a:t>
             </a:r>
             <a:endParaRPr lang="en-US" sz="1100" dirty="0"/>
           </a:p>
